--- a/research/audit/Audit_IT_landshafta.pptx
+++ b/research/audit/Audit_IT_landshafta.pptx
@@ -926,7 +926,7 @@
           <a:lstStyle/>
           <a:p>
             <a:r>
-              <a:t>ПЛЕЙСХОЛДЕР. Правило отбора: конкретная задача, выполненная работа и подтверждённый результат. Перечень поставленных лицензий как самостоятельный кейс не использовать.</a:t>
+              <a:t>Источник — презентация кейсов Нормасофт. Строка «Применимость» — связь кейса с аудитом.</a:t>
             </a:r>
           </a:p>
         </p:txBody>
@@ -996,7 +996,7 @@
           <a:lstStyle/>
           <a:p>
             <a:r>
-              <a:t>ПЛЕЙСХОЛДЕР. Правило отбора: конкретная задача, выполненная работа и подтверждённый результат. Перечень поставленных лицензий как самостоятельный кейс не использовать.</a:t>
+              <a:t>Источник — презентация кейсов Нормасофт. Строка «Применимость» — связь кейса с аудитом.</a:t>
             </a:r>
           </a:p>
         </p:txBody>
@@ -1066,7 +1066,7 @@
           <a:lstStyle/>
           <a:p>
             <a:r>
-              <a:t>ПЛЕЙСХОЛДЕР. Правило отбора: конкретная задача, выполненная работа и подтверждённый результат. Перечень поставленных лицензий как самостоятельный кейс не использовать.</a:t>
+              <a:t>Источник — презентация кейсов Нормасофт. Строка «Применимость» — связь кейса с аудитом.</a:t>
             </a:r>
           </a:p>
         </p:txBody>
@@ -28483,7 +28483,7 @@
                 <a:uFillTx/>
                 <a:latin typeface="+mj-lt"/>
               </a:rPr>
-              <a:t>Кейс 1: [заказчик] — [объект / задача]</a:t>
+              <a:t>Кейс 1: «БЭСК Инжиниринг» — ТИМ для энергообъектов</a:t>
             </a:r>
             <a:endParaRPr lang="ru-RU" sz="2600" b="0" u="none" strike="noStrike">
               <a:solidFill>
@@ -28567,7 +28567,7 @@
       <p:sp>
         <p:nvSpPr>
           <p:cNvPr id="539" name="Google Shape;269;p32">
-            <a:hlinkClick action="ppaction://hlinksldjump" r:id="rId12"/>
+            <a:hlinkClick action="ppaction://hlinksldjump" r:id="rId13"/>
           </p:cNvPr>
           <p:cNvSpPr/>
           <p:nvPr/>
@@ -28921,17 +28921,17 @@
         </p:nvSpPr>
         <p:spPr>
           <a:xfrm>
-            <a:off x="9464040" y="1389888"/>
-            <a:ext cx="2011680" cy="365760"/>
+            <a:off x="594360" y="1965960"/>
+            <a:ext cx="1783080" cy="603504"/>
           </a:xfrm>
           <a:prstGeom prst="snip1Rect">
             <a:avLst/>
           </a:prstGeom>
-          <a:noFill/>
-          <a:ln w="12700">
-            <a:solidFill>
-              <a:srgbClr val="0386FC"/>
-            </a:solidFill>
+          <a:solidFill>
+            <a:srgbClr val="F1F3F6"/>
+          </a:solidFill>
+          <a:ln>
+            <a:noFill/>
           </a:ln>
           <a:effectLst/>
         </p:spPr>
@@ -28953,15 +28953,15 @@
           <a:bodyPr rtlCol="0" anchor="ctr" lIns="73152" rIns="73152" tIns="0" bIns="0" wrap="square"/>
           <a:lstStyle/>
           <a:p>
-            <a:pPr algn="ctr"/>
-            <a:r>
-              <a:rPr sz="1000" b="0">
-                <a:solidFill>
-                  <a:srgbClr val="0386FC"/>
-                </a:solidFill>
-                <a:latin typeface="+mn-lt"/>
-              </a:rPr>
-              <a:t>МАТЕРИАЛЫ ГОТОВЯТСЯ</a:t>
+            <a:pPr algn="l"/>
+            <a:r>
+              <a:rPr sz="1150" b="1">
+                <a:solidFill>
+                  <a:srgbClr val="1A1A1A"/>
+                </a:solidFill>
+                <a:latin typeface="+mj-lt"/>
+              </a:rPr>
+              <a:t>Контекст</a:t>
             </a:r>
           </a:p>
         </p:txBody>
@@ -28974,8 +28974,89 @@
         </p:nvSpPr>
         <p:spPr>
           <a:xfrm>
-            <a:off x="594360" y="2011680"/>
-            <a:ext cx="1920240" cy="566928"/>
+            <a:off x="2450592" y="1965960"/>
+            <a:ext cx="5230368" cy="603504"/>
+          </a:xfrm>
+          <a:prstGeom prst="snip1Rect">
+            <a:avLst/>
+          </a:prstGeom>
+          <a:noFill/>
+          <a:ln w="12700">
+            <a:solidFill>
+              <a:srgbClr val="C9D3E0"/>
+            </a:solidFill>
+          </a:ln>
+          <a:effectLst/>
+        </p:spPr>
+        <p:style>
+          <a:lnRef idx="1">
+            <a:schemeClr val="accent1"/>
+          </a:lnRef>
+          <a:fillRef idx="3">
+            <a:schemeClr val="accent1"/>
+          </a:fillRef>
+          <a:effectRef idx="2">
+            <a:schemeClr val="accent1"/>
+          </a:effectRef>
+          <a:fontRef idx="minor">
+            <a:schemeClr val="lt1"/>
+          </a:fontRef>
+        </p:style>
+        <p:txBody>
+          <a:bodyPr rtlCol="0" anchor="ctr"/>
+          <a:lstStyle/>
+          <a:p/>
+        </p:txBody>
+      </p:sp>
+      <p:sp>
+        <p:nvSpPr>
+          <p:cNvPr id="545" name="TextBox 544"/>
+          <p:cNvSpPr txBox="1"/>
+          <p:nvPr/>
+        </p:nvSpPr>
+        <p:spPr>
+          <a:xfrm>
+            <a:off x="2560320" y="1965960"/>
+            <a:ext cx="5029200" cy="603504"/>
+          </a:xfrm>
+          <a:prstGeom prst="rect">
+            <a:avLst/>
+          </a:prstGeom>
+          <a:noFill/>
+        </p:spPr>
+        <p:txBody>
+          <a:bodyPr wrap="square" anchor="ctr" lIns="0" rIns="0" tIns="0" bIns="0">
+            <a:spAutoFit/>
+          </a:bodyPr>
+          <a:lstStyle/>
+          <a:p>
+            <a:pPr algn="l">
+              <a:spcAft>
+                <a:spcPts val="400"/>
+              </a:spcAft>
+            </a:pPr>
+            <a:r>
+              <a:rPr sz="1000" b="0">
+                <a:solidFill>
+                  <a:srgbClr val="1A1A1A"/>
+                </a:solidFill>
+                <a:latin typeface="+mn-lt"/>
+              </a:rPr>
+              <a:t>Проектирование и строительство объектов электросетевого хозяйства полного цикла; одна из первых компаний в России, внедряющих SmartGrid.</a:t>
+            </a:r>
+          </a:p>
+        </p:txBody>
+      </p:sp>
+      <p:sp>
+        <p:nvSpPr>
+          <p:cNvPr id="546" name="Snip Single Corner Rectangle 545"/>
+          <p:cNvSpPr/>
+          <p:nvPr/>
+        </p:nvSpPr>
+        <p:spPr>
+          <a:xfrm>
+            <a:off x="594360" y="2624328"/>
+            <a:ext cx="1783080" cy="603504"/>
           </a:xfrm>
           <a:prstGeom prst="snip1Rect">
             <a:avLst/>
@@ -29008,37 +29089,36 @@
           <a:p>
             <a:pPr algn="l"/>
             <a:r>
-              <a:rPr sz="1200" b="1">
+              <a:rPr sz="1150" b="1">
                 <a:solidFill>
                   <a:srgbClr val="1A1A1A"/>
                 </a:solidFill>
                 <a:latin typeface="+mj-lt"/>
               </a:rPr>
-              <a:t>Контекст</a:t>
-            </a:r>
-          </a:p>
-        </p:txBody>
-      </p:sp>
-      <p:sp>
-        <p:nvSpPr>
-          <p:cNvPr id="545" name="Snip Single Corner Rectangle 544"/>
+              <a:t>Задача</a:t>
+            </a:r>
+          </a:p>
+        </p:txBody>
+      </p:sp>
+      <p:sp>
+        <p:nvSpPr>
+          <p:cNvPr id="547" name="Snip Single Corner Rectangle 546"/>
           <p:cNvSpPr/>
           <p:nvPr/>
         </p:nvSpPr>
         <p:spPr>
           <a:xfrm>
-            <a:off x="2606040" y="2011680"/>
-            <a:ext cx="5029200" cy="566928"/>
+            <a:off x="2450592" y="2624328"/>
+            <a:ext cx="5230368" cy="603504"/>
           </a:xfrm>
           <a:prstGeom prst="snip1Rect">
             <a:avLst/>
           </a:prstGeom>
           <a:noFill/>
-          <a:ln w="15875">
+          <a:ln w="12700">
             <a:solidFill>
               <a:srgbClr val="C9D3E0"/>
             </a:solidFill>
-            <a:prstDash val="dash"/>
           </a:ln>
           <a:effectLst/>
         </p:spPr>
@@ -29057,32 +29137,60 @@
           </a:fontRef>
         </p:style>
         <p:txBody>
-          <a:bodyPr rtlCol="0" anchor="ctr" lIns="73152" rIns="73152" tIns="0" bIns="0" wrap="square"/>
+          <a:bodyPr rtlCol="0" anchor="ctr"/>
           <a:lstStyle/>
-          <a:p>
-            <a:pPr algn="l"/>
-            <a:r>
-              <a:rPr sz="1050" b="0">
-                <a:solidFill>
-                  <a:srgbClr val="6B7280"/>
+          <a:p/>
+        </p:txBody>
+      </p:sp>
+      <p:sp>
+        <p:nvSpPr>
+          <p:cNvPr id="548" name="TextBox 547"/>
+          <p:cNvSpPr txBox="1"/>
+          <p:nvPr/>
+        </p:nvSpPr>
+        <p:spPr>
+          <a:xfrm>
+            <a:off x="2560320" y="2624328"/>
+            <a:ext cx="5029200" cy="603504"/>
+          </a:xfrm>
+          <a:prstGeom prst="rect">
+            <a:avLst/>
+          </a:prstGeom>
+          <a:noFill/>
+        </p:spPr>
+        <p:txBody>
+          <a:bodyPr wrap="square" anchor="ctr" lIns="0" rIns="0" tIns="0" bIns="0">
+            <a:spAutoFit/>
+          </a:bodyPr>
+          <a:lstStyle/>
+          <a:p>
+            <a:pPr algn="l">
+              <a:spcAft>
+                <a:spcPts val="400"/>
+              </a:spcAft>
+            </a:pPr>
+            <a:r>
+              <a:rPr sz="1000" b="0">
+                <a:solidFill>
+                  <a:srgbClr val="1A1A1A"/>
                 </a:solidFill>
                 <a:latin typeface="+mn-lt"/>
               </a:rPr>
-              <a:t>Объект, подразделения и исходный технологический процесс</a:t>
-            </a:r>
-          </a:p>
-        </p:txBody>
-      </p:sp>
-      <p:sp>
-        <p:nvSpPr>
-          <p:cNvPr id="546" name="Snip Single Corner Rectangle 545"/>
+              <a:t>Перейти на ТИМ: информационные модели с выпуском чертежей и спецификаций, корпоративный ТИМ-стандарт, эффективное проектирование ОРУ, кабельного хозяйства и молниезащиты.</a:t>
+            </a:r>
+          </a:p>
+        </p:txBody>
+      </p:sp>
+      <p:sp>
+        <p:nvSpPr>
+          <p:cNvPr id="549" name="Snip Single Corner Rectangle 548"/>
           <p:cNvSpPr/>
           <p:nvPr/>
         </p:nvSpPr>
         <p:spPr>
           <a:xfrm>
-            <a:off x="594360" y="2670048"/>
-            <a:ext cx="1920240" cy="566928"/>
+            <a:off x="594360" y="3282696"/>
+            <a:ext cx="1783080" cy="603504"/>
           </a:xfrm>
           <a:prstGeom prst="snip1Rect">
             <a:avLst/>
@@ -29115,37 +29223,36 @@
           <a:p>
             <a:pPr algn="l"/>
             <a:r>
-              <a:rPr sz="1200" b="1">
+              <a:rPr sz="1150" b="1">
                 <a:solidFill>
                   <a:srgbClr val="1A1A1A"/>
                 </a:solidFill>
                 <a:latin typeface="+mj-lt"/>
               </a:rPr>
-              <a:t>Задача</a:t>
-            </a:r>
-          </a:p>
-        </p:txBody>
-      </p:sp>
-      <p:sp>
-        <p:nvSpPr>
-          <p:cNvPr id="547" name="Snip Single Corner Rectangle 546"/>
+              <a:t>ИТ-ландшафт</a:t>
+            </a:r>
+          </a:p>
+        </p:txBody>
+      </p:sp>
+      <p:sp>
+        <p:nvSpPr>
+          <p:cNvPr id="550" name="Snip Single Corner Rectangle 549"/>
           <p:cNvSpPr/>
           <p:nvPr/>
         </p:nvSpPr>
         <p:spPr>
           <a:xfrm>
-            <a:off x="2606040" y="2670048"/>
-            <a:ext cx="5029200" cy="566928"/>
+            <a:off x="2450592" y="3282696"/>
+            <a:ext cx="5230368" cy="603504"/>
           </a:xfrm>
           <a:prstGeom prst="snip1Rect">
             <a:avLst/>
           </a:prstGeom>
           <a:noFill/>
-          <a:ln w="15875">
+          <a:ln w="12700">
             <a:solidFill>
               <a:srgbClr val="C9D3E0"/>
             </a:solidFill>
-            <a:prstDash val="dash"/>
           </a:ln>
           <a:effectLst/>
         </p:spPr>
@@ -29164,32 +29271,60 @@
           </a:fontRef>
         </p:style>
         <p:txBody>
-          <a:bodyPr rtlCol="0" anchor="ctr" lIns="73152" rIns="73152" tIns="0" bIns="0" wrap="square"/>
+          <a:bodyPr rtlCol="0" anchor="ctr"/>
           <a:lstStyle/>
-          <a:p>
-            <a:pPr algn="l"/>
-            <a:r>
-              <a:rPr sz="1050" b="0">
-                <a:solidFill>
-                  <a:srgbClr val="6B7280"/>
+          <a:p/>
+        </p:txBody>
+      </p:sp>
+      <p:sp>
+        <p:nvSpPr>
+          <p:cNvPr id="551" name="TextBox 550"/>
+          <p:cNvSpPr txBox="1"/>
+          <p:nvPr/>
+        </p:nvSpPr>
+        <p:spPr>
+          <a:xfrm>
+            <a:off x="2560320" y="3282696"/>
+            <a:ext cx="5029200" cy="603504"/>
+          </a:xfrm>
+          <a:prstGeom prst="rect">
+            <a:avLst/>
+          </a:prstGeom>
+          <a:noFill/>
+        </p:spPr>
+        <p:txBody>
+          <a:bodyPr wrap="square" anchor="ctr" lIns="0" rIns="0" tIns="0" bIns="0">
+            <a:spAutoFit/>
+          </a:bodyPr>
+          <a:lstStyle/>
+          <a:p>
+            <a:pPr algn="l">
+              <a:spcAft>
+                <a:spcPts val="400"/>
+              </a:spcAft>
+            </a:pPr>
+            <a:r>
+              <a:rPr sz="1000" b="0">
+                <a:solidFill>
+                  <a:srgbClr val="1A1A1A"/>
                 </a:solidFill>
                 <a:latin typeface="+mn-lt"/>
               </a:rPr>
-              <a:t>Что требовалось изменить или проверить</a:t>
-            </a:r>
-          </a:p>
-        </p:txBody>
-      </p:sp>
-      <p:sp>
-        <p:nvSpPr>
-          <p:cNvPr id="548" name="Snip Single Corner Rectangle 547"/>
+              <a:t>Связка решений разных разработчиков: nanoCAD BIM Строительство (КР, АР в DWG), Model Studio CS (ОРУ, кабельное хозяйство, молниезащита), CADLib Модель и Архив, IFC.</a:t>
+            </a:r>
+          </a:p>
+        </p:txBody>
+      </p:sp>
+      <p:sp>
+        <p:nvSpPr>
+          <p:cNvPr id="552" name="Snip Single Corner Rectangle 551"/>
           <p:cNvSpPr/>
           <p:nvPr/>
         </p:nvSpPr>
         <p:spPr>
           <a:xfrm>
-            <a:off x="594360" y="3328415"/>
-            <a:ext cx="1920240" cy="566928"/>
+            <a:off x="594360" y="3941063"/>
+            <a:ext cx="1783080" cy="603504"/>
           </a:xfrm>
           <a:prstGeom prst="snip1Rect">
             <a:avLst/>
@@ -29222,37 +29357,36 @@
           <a:p>
             <a:pPr algn="l"/>
             <a:r>
-              <a:rPr sz="1200" b="1">
+              <a:rPr sz="1150" b="1">
                 <a:solidFill>
                   <a:srgbClr val="1A1A1A"/>
                 </a:solidFill>
                 <a:latin typeface="+mj-lt"/>
               </a:rPr>
-              <a:t>ИТ-ландшафт</a:t>
-            </a:r>
-          </a:p>
-        </p:txBody>
-      </p:sp>
-      <p:sp>
-        <p:nvSpPr>
-          <p:cNvPr id="549" name="Snip Single Corner Rectangle 548"/>
+              <a:t>Роль Нормасофт</a:t>
+            </a:r>
+          </a:p>
+        </p:txBody>
+      </p:sp>
+      <p:sp>
+        <p:nvSpPr>
+          <p:cNvPr id="553" name="Snip Single Corner Rectangle 552"/>
           <p:cNvSpPr/>
           <p:nvPr/>
         </p:nvSpPr>
         <p:spPr>
           <a:xfrm>
-            <a:off x="2606040" y="3328415"/>
-            <a:ext cx="5029200" cy="566928"/>
+            <a:off x="2450592" y="3941063"/>
+            <a:ext cx="5230368" cy="603504"/>
           </a:xfrm>
           <a:prstGeom prst="snip1Rect">
             <a:avLst/>
           </a:prstGeom>
           <a:noFill/>
-          <a:ln w="15875">
+          <a:ln w="12700">
             <a:solidFill>
               <a:srgbClr val="C9D3E0"/>
             </a:solidFill>
-            <a:prstDash val="dash"/>
           </a:ln>
           <a:effectLst/>
         </p:spPr>
@@ -29271,32 +29405,194 @@
           </a:fontRef>
         </p:style>
         <p:txBody>
+          <a:bodyPr rtlCol="0" anchor="ctr"/>
+          <a:lstStyle/>
+          <a:p/>
+        </p:txBody>
+      </p:sp>
+      <p:sp>
+        <p:nvSpPr>
+          <p:cNvPr id="554" name="TextBox 553"/>
+          <p:cNvSpPr txBox="1"/>
+          <p:nvPr/>
+        </p:nvSpPr>
+        <p:spPr>
+          <a:xfrm>
+            <a:off x="2560320" y="3941063"/>
+            <a:ext cx="5029200" cy="603504"/>
+          </a:xfrm>
+          <a:prstGeom prst="rect">
+            <a:avLst/>
+          </a:prstGeom>
+          <a:noFill/>
+        </p:spPr>
+        <p:txBody>
+          <a:bodyPr wrap="square" anchor="ctr" lIns="0" rIns="0" tIns="0" bIns="0">
+            <a:spAutoFit/>
+          </a:bodyPr>
+          <a:lstStyle/>
+          <a:p>
+            <a:pPr algn="l">
+              <a:spcAft>
+                <a:spcPts val="400"/>
+              </a:spcAft>
+            </a:pPr>
+            <a:r>
+              <a:rPr sz="1000" b="0">
+                <a:solidFill>
+                  <a:srgbClr val="1A1A1A"/>
+                </a:solidFill>
+                <a:latin typeface="+mn-lt"/>
+              </a:rPr>
+              <a:t>Внедрение обеих связок, пилотный проект, корпоративный ТИМ-стандарт по итогам пилота, обучение сотрудников работе в новой среде.</a:t>
+            </a:r>
+          </a:p>
+        </p:txBody>
+      </p:sp>
+      <p:sp>
+        <p:nvSpPr>
+          <p:cNvPr id="555" name="Snip Single Corner Rectangle 554"/>
+          <p:cNvSpPr/>
+          <p:nvPr/>
+        </p:nvSpPr>
+        <p:spPr>
+          <a:xfrm>
+            <a:off x="594360" y="4599431"/>
+            <a:ext cx="1783080" cy="603504"/>
+          </a:xfrm>
+          <a:prstGeom prst="snip1Rect">
+            <a:avLst/>
+          </a:prstGeom>
+          <a:solidFill>
+            <a:srgbClr val="0386FC"/>
+          </a:solidFill>
+          <a:ln>
+            <a:noFill/>
+          </a:ln>
+          <a:effectLst/>
+        </p:spPr>
+        <p:style>
+          <a:lnRef idx="1">
+            <a:schemeClr val="accent1"/>
+          </a:lnRef>
+          <a:fillRef idx="3">
+            <a:schemeClr val="accent1"/>
+          </a:fillRef>
+          <a:effectRef idx="2">
+            <a:schemeClr val="accent1"/>
+          </a:effectRef>
+          <a:fontRef idx="minor">
+            <a:schemeClr val="lt1"/>
+          </a:fontRef>
+        </p:style>
+        <p:txBody>
           <a:bodyPr rtlCol="0" anchor="ctr" lIns="73152" rIns="73152" tIns="0" bIns="0" wrap="square"/>
           <a:lstStyle/>
           <a:p>
             <a:pPr algn="l"/>
             <a:r>
-              <a:rPr sz="1050" b="0">
-                <a:solidFill>
-                  <a:srgbClr val="6B7280"/>
+              <a:rPr sz="1150" b="1">
+                <a:solidFill>
+                  <a:srgbClr val="FFFFFF"/>
+                </a:solidFill>
+                <a:latin typeface="+mj-lt"/>
+              </a:rPr>
+              <a:t>Результат</a:t>
+            </a:r>
+          </a:p>
+        </p:txBody>
+      </p:sp>
+      <p:sp>
+        <p:nvSpPr>
+          <p:cNvPr id="556" name="Snip Single Corner Rectangle 555"/>
+          <p:cNvSpPr/>
+          <p:nvPr/>
+        </p:nvSpPr>
+        <p:spPr>
+          <a:xfrm>
+            <a:off x="2450592" y="4599431"/>
+            <a:ext cx="5230368" cy="603504"/>
+          </a:xfrm>
+          <a:prstGeom prst="snip1Rect">
+            <a:avLst/>
+          </a:prstGeom>
+          <a:solidFill>
+            <a:srgbClr val="E3EFFE"/>
+          </a:solidFill>
+          <a:ln>
+            <a:noFill/>
+          </a:ln>
+          <a:effectLst/>
+        </p:spPr>
+        <p:style>
+          <a:lnRef idx="1">
+            <a:schemeClr val="accent1"/>
+          </a:lnRef>
+          <a:fillRef idx="3">
+            <a:schemeClr val="accent1"/>
+          </a:fillRef>
+          <a:effectRef idx="2">
+            <a:schemeClr val="accent1"/>
+          </a:effectRef>
+          <a:fontRef idx="minor">
+            <a:schemeClr val="lt1"/>
+          </a:fontRef>
+        </p:style>
+        <p:txBody>
+          <a:bodyPr rtlCol="0" anchor="ctr"/>
+          <a:lstStyle/>
+          <a:p/>
+        </p:txBody>
+      </p:sp>
+      <p:sp>
+        <p:nvSpPr>
+          <p:cNvPr id="557" name="TextBox 556"/>
+          <p:cNvSpPr txBox="1"/>
+          <p:nvPr/>
+        </p:nvSpPr>
+        <p:spPr>
+          <a:xfrm>
+            <a:off x="2560320" y="4599431"/>
+            <a:ext cx="5029200" cy="603504"/>
+          </a:xfrm>
+          <a:prstGeom prst="rect">
+            <a:avLst/>
+          </a:prstGeom>
+          <a:noFill/>
+        </p:spPr>
+        <p:txBody>
+          <a:bodyPr wrap="square" anchor="ctr" lIns="0" rIns="0" tIns="0" bIns="0">
+            <a:spAutoFit/>
+          </a:bodyPr>
+          <a:lstStyle/>
+          <a:p>
+            <a:pPr algn="l">
+              <a:spcAft>
+                <a:spcPts val="400"/>
+              </a:spcAft>
+            </a:pPr>
+            <a:r>
+              <a:rPr sz="1000" b="0">
+                <a:solidFill>
+                  <a:srgbClr val="1A1A1A"/>
                 </a:solidFill>
                 <a:latin typeface="+mn-lt"/>
               </a:rPr>
-              <a:t>Какие продукты и форматы уже использовались, что нужно было сохранить</a:t>
-            </a:r>
-          </a:p>
-        </p:txBody>
-      </p:sp>
-      <p:sp>
-        <p:nvSpPr>
-          <p:cNvPr id="550" name="Snip Single Corner Rectangle 549"/>
+              <a:t>Единая среда ЦИМ для всех отделов; автоматический выпуск документации и спецификаций; выгрузка IFC в экспертизу; коллизии выявляются до стройки, согласования быстрее.</a:t>
+            </a:r>
+          </a:p>
+        </p:txBody>
+      </p:sp>
+      <p:sp>
+        <p:nvSpPr>
+          <p:cNvPr id="558" name="Snip Single Corner Rectangle 557"/>
           <p:cNvSpPr/>
           <p:nvPr/>
         </p:nvSpPr>
         <p:spPr>
           <a:xfrm>
-            <a:off x="594360" y="3986783"/>
-            <a:ext cx="1920240" cy="566928"/>
+            <a:off x="594360" y="5257799"/>
+            <a:ext cx="1783080" cy="603504"/>
           </a:xfrm>
           <a:prstGeom prst="snip1Rect">
             <a:avLst/>
@@ -29329,37 +29625,36 @@
           <a:p>
             <a:pPr algn="l"/>
             <a:r>
-              <a:rPr sz="1200" b="1">
+              <a:rPr sz="1150" b="1">
                 <a:solidFill>
                   <a:srgbClr val="1A1A1A"/>
                 </a:solidFill>
                 <a:latin typeface="+mj-lt"/>
               </a:rPr>
-              <a:t>Работа Нормасофт</a:t>
-            </a:r>
-          </a:p>
-        </p:txBody>
-      </p:sp>
-      <p:sp>
-        <p:nvSpPr>
-          <p:cNvPr id="551" name="Snip Single Corner Rectangle 550"/>
+              <a:t>Применимость</a:t>
+            </a:r>
+          </a:p>
+        </p:txBody>
+      </p:sp>
+      <p:sp>
+        <p:nvSpPr>
+          <p:cNvPr id="559" name="Snip Single Corner Rectangle 558"/>
           <p:cNvSpPr/>
           <p:nvPr/>
         </p:nvSpPr>
         <p:spPr>
           <a:xfrm>
-            <a:off x="2606040" y="3986783"/>
-            <a:ext cx="5029200" cy="566928"/>
+            <a:off x="2450592" y="5257799"/>
+            <a:ext cx="5230368" cy="603504"/>
           </a:xfrm>
           <a:prstGeom prst="snip1Rect">
             <a:avLst/>
           </a:prstGeom>
           <a:noFill/>
-          <a:ln w="15875">
+          <a:ln w="12700">
             <a:solidFill>
               <a:srgbClr val="C9D3E0"/>
             </a:solidFill>
-            <a:prstDash val="dash"/>
           </a:ln>
           <a:effectLst/>
         </p:spPr>
@@ -29378,39 +29673,130 @@
           </a:fontRef>
         </p:style>
         <p:txBody>
-          <a:bodyPr rtlCol="0" anchor="ctr" lIns="73152" rIns="73152" tIns="0" bIns="0" wrap="square"/>
+          <a:bodyPr rtlCol="0" anchor="ctr"/>
           <a:lstStyle/>
-          <a:p>
-            <a:pPr algn="l"/>
-            <a:r>
-              <a:rPr sz="1050" b="0">
+          <a:p/>
+        </p:txBody>
+      </p:sp>
+      <p:sp>
+        <p:nvSpPr>
+          <p:cNvPr id="560" name="TextBox 559"/>
+          <p:cNvSpPr txBox="1"/>
+          <p:nvPr/>
+        </p:nvSpPr>
+        <p:spPr>
+          <a:xfrm>
+            <a:off x="2560320" y="5257799"/>
+            <a:ext cx="5029200" cy="603504"/>
+          </a:xfrm>
+          <a:prstGeom prst="rect">
+            <a:avLst/>
+          </a:prstGeom>
+          <a:noFill/>
+        </p:spPr>
+        <p:txBody>
+          <a:bodyPr wrap="square" anchor="ctr" lIns="0" rIns="0" tIns="0" bIns="0">
+            <a:spAutoFit/>
+          </a:bodyPr>
+          <a:lstStyle/>
+          <a:p>
+            <a:pPr algn="l">
+              <a:spcAft>
+                <a:spcPts val="400"/>
+              </a:spcAft>
+            </a:pPr>
+            <a:r>
+              <a:rPr sz="1000" b="0">
+                <a:solidFill>
+                  <a:srgbClr val="1A1A1A"/>
+                </a:solidFill>
+                <a:latin typeface="+mn-lt"/>
+              </a:rPr>
+              <a:t>Межвендорная архитектура под задачи разделов и стандарт из пилота — то, что аудит закладывает в целевой ИТ-ландшафт и дорожную карту.</a:t>
+            </a:r>
+          </a:p>
+        </p:txBody>
+      </p:sp>
+      <p:pic>
+        <p:nvPicPr>
+          <p:cNvPr id="561" name="Picture 560" descr="besk_model.png"/>
+          <p:cNvPicPr>
+            <a:picLocks noChangeAspect="1"/>
+          </p:cNvPicPr>
+          <p:nvPr/>
+        </p:nvPicPr>
+        <p:blipFill>
+          <a:blip r:embed="rId11"/>
+          <a:stretch>
+            <a:fillRect/>
+          </a:stretch>
+        </p:blipFill>
+        <p:spPr>
+          <a:xfrm>
+            <a:off x="7863840" y="1965960"/>
+            <a:ext cx="3611880" cy="3039594"/>
+          </a:xfrm>
+          <a:prstGeom prst="rect">
+            <a:avLst/>
+          </a:prstGeom>
+        </p:spPr>
+      </p:pic>
+      <p:sp>
+        <p:nvSpPr>
+          <p:cNvPr id="562" name="TextBox 561"/>
+          <p:cNvSpPr txBox="1"/>
+          <p:nvPr/>
+        </p:nvSpPr>
+        <p:spPr>
+          <a:xfrm>
+            <a:off x="7863840" y="5577840"/>
+            <a:ext cx="3611880" cy="274320"/>
+          </a:xfrm>
+          <a:prstGeom prst="rect">
+            <a:avLst/>
+          </a:prstGeom>
+          <a:noFill/>
+        </p:spPr>
+        <p:txBody>
+          <a:bodyPr wrap="square" anchor="t" lIns="0" rIns="0" tIns="0" bIns="0">
+            <a:spAutoFit/>
+          </a:bodyPr>
+          <a:lstStyle/>
+          <a:p>
+            <a:pPr algn="ctr">
+              <a:spcAft>
+                <a:spcPts val="400"/>
+              </a:spcAft>
+            </a:pPr>
+            <a:r>
+              <a:rPr sz="900" b="0">
                 <a:solidFill>
                   <a:srgbClr val="6B7280"/>
                 </a:solidFill>
                 <a:latin typeface="+mn-lt"/>
               </a:rPr>
-              <a:t>Обследование, настройка, интеграция, обучение, пилот, передача требований разработчикам</a:t>
-            </a:r>
-          </a:p>
-        </p:txBody>
-      </p:sp>
-      <p:sp>
-        <p:nvSpPr>
-          <p:cNvPr id="552" name="Snip Single Corner Rectangle 551"/>
+              <a:t>Информационная модель объекта</a:t>
+            </a:r>
+          </a:p>
+        </p:txBody>
+      </p:sp>
+      <p:sp>
+        <p:nvSpPr>
+          <p:cNvPr id="563" name="nav">
+            <a:hlinkClick action="ppaction://hlinksldjump" r:id="rId5"/>
+          </p:cNvPr>
           <p:cNvSpPr/>
           <p:nvPr/>
         </p:nvSpPr>
         <p:spPr>
           <a:xfrm>
-            <a:off x="594360" y="4645151"/>
-            <a:ext cx="1920240" cy="566928"/>
+            <a:off x="932688" y="429768"/>
+            <a:ext cx="1385316" cy="338328"/>
           </a:xfrm>
           <a:prstGeom prst="snip1Rect">
             <a:avLst/>
           </a:prstGeom>
-          <a:solidFill>
-            <a:srgbClr val="0386FC"/>
-          </a:solidFill>
+          <a:noFill/>
           <a:ln>
             <a:noFill/>
           </a:ln>
@@ -29434,39 +29820,38 @@
           <a:bodyPr rtlCol="0" anchor="ctr" lIns="73152" rIns="73152" tIns="0" bIns="0" wrap="square"/>
           <a:lstStyle/>
           <a:p>
-            <a:pPr algn="l"/>
-            <a:r>
-              <a:rPr sz="1200" b="1">
+            <a:pPr algn="ctr"/>
+            <a:r>
+              <a:rPr sz="1100" b="0">
                 <a:solidFill>
                   <a:srgbClr val="FFFFFF"/>
                 </a:solidFill>
-                <a:latin typeface="+mj-lt"/>
-              </a:rPr>
-              <a:t>Результат</a:t>
-            </a:r>
-          </a:p>
-        </p:txBody>
-      </p:sp>
-      <p:sp>
-        <p:nvSpPr>
-          <p:cNvPr id="553" name="Snip Single Corner Rectangle 552"/>
+                <a:latin typeface="Manrope"/>
+              </a:rPr>
+              <a:t>ЗАЧЕМ АУДИТ</a:t>
+            </a:r>
+          </a:p>
+        </p:txBody>
+      </p:sp>
+      <p:sp>
+        <p:nvSpPr>
+          <p:cNvPr id="564" name="nav">
+            <a:hlinkClick action="ppaction://hlinksldjump" r:id="rId4"/>
+          </p:cNvPr>
           <p:cNvSpPr/>
           <p:nvPr/>
         </p:nvSpPr>
         <p:spPr>
           <a:xfrm>
-            <a:off x="2606040" y="4645151"/>
-            <a:ext cx="5029200" cy="566928"/>
+            <a:off x="2409444" y="429768"/>
+            <a:ext cx="809244" cy="338328"/>
           </a:xfrm>
           <a:prstGeom prst="snip1Rect">
             <a:avLst/>
           </a:prstGeom>
           <a:noFill/>
-          <a:ln w="15875">
-            <a:solidFill>
-              <a:srgbClr val="C9D3E0"/>
-            </a:solidFill>
-            <a:prstDash val="dash"/>
+          <a:ln>
+            <a:noFill/>
           </a:ln>
           <a:effectLst/>
         </p:spPr>
@@ -29488,36 +29873,36 @@
           <a:bodyPr rtlCol="0" anchor="ctr" lIns="73152" rIns="73152" tIns="0" bIns="0" wrap="square"/>
           <a:lstStyle/>
           <a:p>
-            <a:pPr algn="l"/>
-            <a:r>
-              <a:rPr sz="1050" b="0">
-                <a:solidFill>
-                  <a:srgbClr val="6B7280"/>
-                </a:solidFill>
-                <a:latin typeface="+mn-lt"/>
-              </a:rPr>
-              <a:t>Что заказчик смог сделать сам; какие документы или модели получил; что осталось в бэклоге</a:t>
-            </a:r>
-          </a:p>
-        </p:txBody>
-      </p:sp>
-      <p:sp>
-        <p:nvSpPr>
-          <p:cNvPr id="554" name="Snip Single Corner Rectangle 553"/>
+            <a:pPr algn="ctr"/>
+            <a:r>
+              <a:rPr sz="1100" b="0">
+                <a:solidFill>
+                  <a:srgbClr val="FFFFFF"/>
+                </a:solidFill>
+                <a:latin typeface="Manrope"/>
+              </a:rPr>
+              <a:t>ЭТАПЫ</a:t>
+            </a:r>
+          </a:p>
+        </p:txBody>
+      </p:sp>
+      <p:sp>
+        <p:nvSpPr>
+          <p:cNvPr id="565" name="nav">
+            <a:hlinkClick action="ppaction://hlinksldjump" r:id="rId16"/>
+          </p:cNvPr>
           <p:cNvSpPr/>
           <p:nvPr/>
         </p:nvSpPr>
         <p:spPr>
           <a:xfrm>
-            <a:off x="594360" y="5303519"/>
-            <a:ext cx="1920240" cy="566928"/>
+            <a:off x="3310128" y="429768"/>
+            <a:ext cx="1193292" cy="338328"/>
           </a:xfrm>
           <a:prstGeom prst="snip1Rect">
             <a:avLst/>
           </a:prstGeom>
-          <a:solidFill>
-            <a:srgbClr val="F1F3F6"/>
-          </a:solidFill>
+          <a:noFill/>
           <a:ln>
             <a:noFill/>
           </a:ln>
@@ -29541,39 +29926,40 @@
           <a:bodyPr rtlCol="0" anchor="ctr" lIns="73152" rIns="73152" tIns="0" bIns="0" wrap="square"/>
           <a:lstStyle/>
           <a:p>
-            <a:pPr algn="l"/>
-            <a:r>
-              <a:rPr sz="1200" b="1">
-                <a:solidFill>
-                  <a:srgbClr val="1A1A1A"/>
-                </a:solidFill>
-                <a:latin typeface="+mj-lt"/>
-              </a:rPr>
-              <a:t>Применимость</a:t>
-            </a:r>
-          </a:p>
-        </p:txBody>
-      </p:sp>
-      <p:sp>
-        <p:nvSpPr>
-          <p:cNvPr id="555" name="Snip Single Corner Rectangle 554"/>
+            <a:pPr algn="ctr"/>
+            <a:r>
+              <a:rPr sz="1100" b="0">
+                <a:solidFill>
+                  <a:srgbClr val="FFFFFF"/>
+                </a:solidFill>
+                <a:latin typeface="Manrope"/>
+              </a:rPr>
+              <a:t>РЕЗУЛЬТАТ</a:t>
+            </a:r>
+          </a:p>
+        </p:txBody>
+      </p:sp>
+      <p:sp>
+        <p:nvSpPr>
+          <p:cNvPr id="566" name="nav">
+            <a:hlinkClick action="ppaction://hlinksldjump" r:id="rId17"/>
+          </p:cNvPr>
           <p:cNvSpPr/>
           <p:nvPr/>
         </p:nvSpPr>
         <p:spPr>
           <a:xfrm>
-            <a:off x="2606040" y="5303519"/>
-            <a:ext cx="5029200" cy="566928"/>
+            <a:off x="4594860" y="429768"/>
+            <a:ext cx="809244" cy="338328"/>
           </a:xfrm>
           <a:prstGeom prst="snip1Rect">
             <a:avLst/>
           </a:prstGeom>
-          <a:noFill/>
-          <a:ln w="15875">
-            <a:solidFill>
-              <a:srgbClr val="C9D3E0"/>
-            </a:solidFill>
-            <a:prstDash val="dash"/>
+          <a:solidFill>
+            <a:srgbClr val="FFFFFF"/>
+          </a:solidFill>
+          <a:ln>
+            <a:noFill/>
           </a:ln>
           <a:effectLst/>
         </p:spPr>
@@ -29595,41 +29981,38 @@
           <a:bodyPr rtlCol="0" anchor="ctr" lIns="73152" rIns="73152" tIns="0" bIns="0" wrap="square"/>
           <a:lstStyle/>
           <a:p>
-            <a:pPr algn="l"/>
-            <a:r>
-              <a:rPr sz="1050" b="0">
-                <a:solidFill>
-                  <a:srgbClr val="6B7280"/>
-                </a:solidFill>
-                <a:latin typeface="+mn-lt"/>
-              </a:rPr>
-              <a:t>Что из кейса можно применить в вашей организации</a:t>
-            </a:r>
-          </a:p>
-        </p:txBody>
-      </p:sp>
-      <p:sp>
-        <p:nvSpPr>
-          <p:cNvPr id="556" name="Snip Single Corner Rectangle 555"/>
+            <a:pPr algn="ctr"/>
+            <a:r>
+              <a:rPr sz="1100" b="0">
+                <a:solidFill>
+                  <a:srgbClr val="0386FC"/>
+                </a:solidFill>
+                <a:latin typeface="Manrope"/>
+              </a:rPr>
+              <a:t>КЕЙСЫ</a:t>
+            </a:r>
+          </a:p>
+        </p:txBody>
+      </p:sp>
+      <p:sp>
+        <p:nvSpPr>
+          <p:cNvPr id="567" name="nav">
+            <a:hlinkClick action="ppaction://hlinksldjump" r:id="rId3"/>
+          </p:cNvPr>
           <p:cNvSpPr/>
           <p:nvPr/>
         </p:nvSpPr>
         <p:spPr>
           <a:xfrm>
-            <a:off x="7863840" y="2011680"/>
-            <a:ext cx="3611880" cy="3877056"/>
+            <a:off x="5495544" y="429768"/>
+            <a:ext cx="1193292" cy="338328"/>
           </a:xfrm>
           <a:prstGeom prst="snip1Rect">
             <a:avLst/>
           </a:prstGeom>
-          <a:solidFill>
-            <a:srgbClr val="F1F3F6"/>
-          </a:solidFill>
-          <a:ln w="15875">
-            <a:solidFill>
-              <a:srgbClr val="C9D3E0"/>
-            </a:solidFill>
-            <a:prstDash val="dash"/>
+          <a:noFill/>
+          <a:ln>
+            <a:noFill/>
           </a:ln>
           <a:effectLst/>
         </p:spPr>
@@ -29653,29 +30036,29 @@
           <a:p>
             <a:pPr algn="ctr"/>
             <a:r>
-              <a:rPr sz="1200" b="0">
-                <a:solidFill>
-                  <a:srgbClr val="6B7280"/>
-                </a:solidFill>
-                <a:latin typeface="+mn-lt"/>
-              </a:rPr>
-              <a:t>Изображение объекта или фрагмент карты ИТ-ландшафта</a:t>
-            </a:r>
-          </a:p>
-        </p:txBody>
-      </p:sp>
-      <p:sp>
-        <p:nvSpPr>
-          <p:cNvPr id="557" name="nav">
-            <a:hlinkClick action="ppaction://hlinksldjump" r:id="rId13"/>
+              <a:rPr sz="1100" b="0">
+                <a:solidFill>
+                  <a:srgbClr val="FFFFFF"/>
+                </a:solidFill>
+                <a:latin typeface="Manrope"/>
+              </a:rPr>
+              <a:t>ВНЕДРЕНИЕ</a:t>
+            </a:r>
+          </a:p>
+        </p:txBody>
+      </p:sp>
+      <p:sp>
+        <p:nvSpPr>
+          <p:cNvPr id="568" name="nav">
+            <a:hlinkClick action="ppaction://hlinksldjump" r:id="rId2"/>
           </p:cNvPr>
           <p:cNvSpPr/>
           <p:nvPr/>
         </p:nvSpPr>
         <p:spPr>
           <a:xfrm>
-            <a:off x="932688" y="429768"/>
-            <a:ext cx="1385316" cy="338328"/>
+            <a:off x="6780276" y="429768"/>
+            <a:ext cx="1193292" cy="338328"/>
           </a:xfrm>
           <a:prstGeom prst="snip1Rect">
             <a:avLst/>
@@ -29712,23 +30095,23 @@
                 </a:solidFill>
                 <a:latin typeface="Manrope"/>
               </a:rPr>
-              <a:t>ЗАЧЕМ АУДИТ</a:t>
-            </a:r>
-          </a:p>
-        </p:txBody>
-      </p:sp>
-      <p:sp>
-        <p:nvSpPr>
-          <p:cNvPr id="558" name="nav">
-            <a:hlinkClick action="ppaction://hlinksldjump" r:id="rId5"/>
+              <a:t>НОРМАСОФТ</a:t>
+            </a:r>
+          </a:p>
+        </p:txBody>
+      </p:sp>
+      <p:sp>
+        <p:nvSpPr>
+          <p:cNvPr id="569" name="nav">
+            <a:hlinkClick action="ppaction://hlinksldjump" r:id="rId18"/>
           </p:cNvPr>
           <p:cNvSpPr/>
           <p:nvPr/>
         </p:nvSpPr>
         <p:spPr>
           <a:xfrm>
-            <a:off x="2409444" y="429768"/>
-            <a:ext cx="809244" cy="338328"/>
+            <a:off x="8065008" y="429768"/>
+            <a:ext cx="1289304" cy="338328"/>
           </a:xfrm>
           <a:prstGeom prst="snip1Rect">
             <a:avLst/>
@@ -29765,273 +30148,6 @@
                 </a:solidFill>
                 <a:latin typeface="Manrope"/>
               </a:rPr>
-              <a:t>ЭТАПЫ</a:t>
-            </a:r>
-          </a:p>
-        </p:txBody>
-      </p:sp>
-      <p:sp>
-        <p:nvSpPr>
-          <p:cNvPr id="559" name="nav">
-            <a:hlinkClick action="ppaction://hlinksldjump" r:id="rId4"/>
-          </p:cNvPr>
-          <p:cNvSpPr/>
-          <p:nvPr/>
-        </p:nvSpPr>
-        <p:spPr>
-          <a:xfrm>
-            <a:off x="3310128" y="429768"/>
-            <a:ext cx="1193292" cy="338328"/>
-          </a:xfrm>
-          <a:prstGeom prst="snip1Rect">
-            <a:avLst/>
-          </a:prstGeom>
-          <a:noFill/>
-          <a:ln>
-            <a:noFill/>
-          </a:ln>
-          <a:effectLst/>
-        </p:spPr>
-        <p:style>
-          <a:lnRef idx="1">
-            <a:schemeClr val="accent1"/>
-          </a:lnRef>
-          <a:fillRef idx="3">
-            <a:schemeClr val="accent1"/>
-          </a:fillRef>
-          <a:effectRef idx="2">
-            <a:schemeClr val="accent1"/>
-          </a:effectRef>
-          <a:fontRef idx="minor">
-            <a:schemeClr val="lt1"/>
-          </a:fontRef>
-        </p:style>
-        <p:txBody>
-          <a:bodyPr rtlCol="0" anchor="ctr" lIns="73152" rIns="73152" tIns="0" bIns="0" wrap="square"/>
-          <a:lstStyle/>
-          <a:p>
-            <a:pPr algn="ctr"/>
-            <a:r>
-              <a:rPr sz="1100" b="0">
-                <a:solidFill>
-                  <a:srgbClr val="FFFFFF"/>
-                </a:solidFill>
-                <a:latin typeface="Manrope"/>
-              </a:rPr>
-              <a:t>РЕЗУЛЬТАТ</a:t>
-            </a:r>
-          </a:p>
-        </p:txBody>
-      </p:sp>
-      <p:sp>
-        <p:nvSpPr>
-          <p:cNvPr id="560" name="nav">
-            <a:hlinkClick action="ppaction://hlinksldjump" r:id="rId16"/>
-          </p:cNvPr>
-          <p:cNvSpPr/>
-          <p:nvPr/>
-        </p:nvSpPr>
-        <p:spPr>
-          <a:xfrm>
-            <a:off x="4594860" y="429768"/>
-            <a:ext cx="809244" cy="338328"/>
-          </a:xfrm>
-          <a:prstGeom prst="snip1Rect">
-            <a:avLst/>
-          </a:prstGeom>
-          <a:solidFill>
-            <a:srgbClr val="FFFFFF"/>
-          </a:solidFill>
-          <a:ln>
-            <a:noFill/>
-          </a:ln>
-          <a:effectLst/>
-        </p:spPr>
-        <p:style>
-          <a:lnRef idx="1">
-            <a:schemeClr val="accent1"/>
-          </a:lnRef>
-          <a:fillRef idx="3">
-            <a:schemeClr val="accent1"/>
-          </a:fillRef>
-          <a:effectRef idx="2">
-            <a:schemeClr val="accent1"/>
-          </a:effectRef>
-          <a:fontRef idx="minor">
-            <a:schemeClr val="lt1"/>
-          </a:fontRef>
-        </p:style>
-        <p:txBody>
-          <a:bodyPr rtlCol="0" anchor="ctr" lIns="73152" rIns="73152" tIns="0" bIns="0" wrap="square"/>
-          <a:lstStyle/>
-          <a:p>
-            <a:pPr algn="ctr"/>
-            <a:r>
-              <a:rPr sz="1100" b="0">
-                <a:solidFill>
-                  <a:srgbClr val="0386FC"/>
-                </a:solidFill>
-                <a:latin typeface="Manrope"/>
-              </a:rPr>
-              <a:t>КЕЙСЫ</a:t>
-            </a:r>
-          </a:p>
-        </p:txBody>
-      </p:sp>
-      <p:sp>
-        <p:nvSpPr>
-          <p:cNvPr id="561" name="nav">
-            <a:hlinkClick action="ppaction://hlinksldjump" r:id="rId3"/>
-          </p:cNvPr>
-          <p:cNvSpPr/>
-          <p:nvPr/>
-        </p:nvSpPr>
-        <p:spPr>
-          <a:xfrm>
-            <a:off x="5495544" y="429768"/>
-            <a:ext cx="1193292" cy="338328"/>
-          </a:xfrm>
-          <a:prstGeom prst="snip1Rect">
-            <a:avLst/>
-          </a:prstGeom>
-          <a:noFill/>
-          <a:ln>
-            <a:noFill/>
-          </a:ln>
-          <a:effectLst/>
-        </p:spPr>
-        <p:style>
-          <a:lnRef idx="1">
-            <a:schemeClr val="accent1"/>
-          </a:lnRef>
-          <a:fillRef idx="3">
-            <a:schemeClr val="accent1"/>
-          </a:fillRef>
-          <a:effectRef idx="2">
-            <a:schemeClr val="accent1"/>
-          </a:effectRef>
-          <a:fontRef idx="minor">
-            <a:schemeClr val="lt1"/>
-          </a:fontRef>
-        </p:style>
-        <p:txBody>
-          <a:bodyPr rtlCol="0" anchor="ctr" lIns="73152" rIns="73152" tIns="0" bIns="0" wrap="square"/>
-          <a:lstStyle/>
-          <a:p>
-            <a:pPr algn="ctr"/>
-            <a:r>
-              <a:rPr sz="1100" b="0">
-                <a:solidFill>
-                  <a:srgbClr val="FFFFFF"/>
-                </a:solidFill>
-                <a:latin typeface="Manrope"/>
-              </a:rPr>
-              <a:t>ВНЕДРЕНИЕ</a:t>
-            </a:r>
-          </a:p>
-        </p:txBody>
-      </p:sp>
-      <p:sp>
-        <p:nvSpPr>
-          <p:cNvPr id="562" name="nav">
-            <a:hlinkClick action="ppaction://hlinksldjump" r:id="rId2"/>
-          </p:cNvPr>
-          <p:cNvSpPr/>
-          <p:nvPr/>
-        </p:nvSpPr>
-        <p:spPr>
-          <a:xfrm>
-            <a:off x="6780276" y="429768"/>
-            <a:ext cx="1193292" cy="338328"/>
-          </a:xfrm>
-          <a:prstGeom prst="snip1Rect">
-            <a:avLst/>
-          </a:prstGeom>
-          <a:noFill/>
-          <a:ln>
-            <a:noFill/>
-          </a:ln>
-          <a:effectLst/>
-        </p:spPr>
-        <p:style>
-          <a:lnRef idx="1">
-            <a:schemeClr val="accent1"/>
-          </a:lnRef>
-          <a:fillRef idx="3">
-            <a:schemeClr val="accent1"/>
-          </a:fillRef>
-          <a:effectRef idx="2">
-            <a:schemeClr val="accent1"/>
-          </a:effectRef>
-          <a:fontRef idx="minor">
-            <a:schemeClr val="lt1"/>
-          </a:fontRef>
-        </p:style>
-        <p:txBody>
-          <a:bodyPr rtlCol="0" anchor="ctr" lIns="73152" rIns="73152" tIns="0" bIns="0" wrap="square"/>
-          <a:lstStyle/>
-          <a:p>
-            <a:pPr algn="ctr"/>
-            <a:r>
-              <a:rPr sz="1100" b="0">
-                <a:solidFill>
-                  <a:srgbClr val="FFFFFF"/>
-                </a:solidFill>
-                <a:latin typeface="Manrope"/>
-              </a:rPr>
-              <a:t>НОРМАСОФТ</a:t>
-            </a:r>
-          </a:p>
-        </p:txBody>
-      </p:sp>
-      <p:sp>
-        <p:nvSpPr>
-          <p:cNvPr id="563" name="nav">
-            <a:hlinkClick action="ppaction://hlinksldjump" r:id="rId17"/>
-          </p:cNvPr>
-          <p:cNvSpPr/>
-          <p:nvPr/>
-        </p:nvSpPr>
-        <p:spPr>
-          <a:xfrm>
-            <a:off x="8065008" y="429768"/>
-            <a:ext cx="1289304" cy="338328"/>
-          </a:xfrm>
-          <a:prstGeom prst="snip1Rect">
-            <a:avLst/>
-          </a:prstGeom>
-          <a:noFill/>
-          <a:ln>
-            <a:noFill/>
-          </a:ln>
-          <a:effectLst/>
-        </p:spPr>
-        <p:style>
-          <a:lnRef idx="1">
-            <a:schemeClr val="accent1"/>
-          </a:lnRef>
-          <a:fillRef idx="3">
-            <a:schemeClr val="accent1"/>
-          </a:fillRef>
-          <a:effectRef idx="2">
-            <a:schemeClr val="accent1"/>
-          </a:effectRef>
-          <a:fontRef idx="minor">
-            <a:schemeClr val="lt1"/>
-          </a:fontRef>
-        </p:style>
-        <p:txBody>
-          <a:bodyPr rtlCol="0" anchor="ctr" lIns="73152" rIns="73152" tIns="0" bIns="0" wrap="square"/>
-          <a:lstStyle/>
-          <a:p>
-            <a:pPr algn="ctr"/>
-            <a:r>
-              <a:rPr sz="1100" b="0">
-                <a:solidFill>
-                  <a:srgbClr val="FFFFFF"/>
-                </a:solidFill>
-                <a:latin typeface="Manrope"/>
-              </a:rPr>
               <a:t>ОБСУЖДЕНИЕ</a:t>
             </a:r>
           </a:p>
@@ -30039,7 +30155,7 @@
       </p:sp>
       <p:sp>
         <p:nvSpPr>
-          <p:cNvPr id="564" name="nav">
+          <p:cNvPr id="570" name="nav">
             <a:hlinkClick action="ppaction://hlinksldjump" r:id="rId10"/>
           </p:cNvPr>
           <p:cNvSpPr/>
@@ -30245,7 +30361,7 @@
                 <a:uFillTx/>
                 <a:latin typeface="+mj-lt"/>
               </a:rPr>
-              <a:t>Кейс 2: [заказчик] — [объект / задача]</a:t>
+              <a:t>Кейс 2: «Т Плюс» — единая САПР-платформа</a:t>
             </a:r>
             <a:endParaRPr lang="ru-RU" sz="2600" b="0" u="none" strike="noStrike">
               <a:solidFill>
@@ -30683,17 +30799,17 @@
         </p:nvSpPr>
         <p:spPr>
           <a:xfrm>
-            <a:off x="9464040" y="1389888"/>
-            <a:ext cx="2011680" cy="365760"/>
+            <a:off x="594360" y="1965960"/>
+            <a:ext cx="1783080" cy="603504"/>
           </a:xfrm>
           <a:prstGeom prst="snip1Rect">
             <a:avLst/>
           </a:prstGeom>
-          <a:noFill/>
-          <a:ln w="12700">
-            <a:solidFill>
-              <a:srgbClr val="0386FC"/>
-            </a:solidFill>
+          <a:solidFill>
+            <a:srgbClr val="F1F3F6"/>
+          </a:solidFill>
+          <a:ln>
+            <a:noFill/>
           </a:ln>
           <a:effectLst/>
         </p:spPr>
@@ -30715,15 +30831,15 @@
           <a:bodyPr rtlCol="0" anchor="ctr" lIns="73152" rIns="73152" tIns="0" bIns="0" wrap="square"/>
           <a:lstStyle/>
           <a:p>
-            <a:pPr algn="ctr"/>
-            <a:r>
-              <a:rPr sz="1000" b="0">
-                <a:solidFill>
-                  <a:srgbClr val="0386FC"/>
-                </a:solidFill>
-                <a:latin typeface="+mn-lt"/>
-              </a:rPr>
-              <a:t>МАТЕРИАЛЫ ГОТОВЯТСЯ</a:t>
+            <a:pPr algn="l"/>
+            <a:r>
+              <a:rPr sz="1150" b="1">
+                <a:solidFill>
+                  <a:srgbClr val="1A1A1A"/>
+                </a:solidFill>
+                <a:latin typeface="+mj-lt"/>
+              </a:rPr>
+              <a:t>Контекст</a:t>
             </a:r>
           </a:p>
         </p:txBody>
@@ -30736,8 +30852,89 @@
         </p:nvSpPr>
         <p:spPr>
           <a:xfrm>
-            <a:off x="594360" y="2011680"/>
-            <a:ext cx="1920240" cy="566928"/>
+            <a:off x="2450592" y="1965960"/>
+            <a:ext cx="5230368" cy="603504"/>
+          </a:xfrm>
+          <a:prstGeom prst="snip1Rect">
+            <a:avLst/>
+          </a:prstGeom>
+          <a:noFill/>
+          <a:ln w="12700">
+            <a:solidFill>
+              <a:srgbClr val="C9D3E0"/>
+            </a:solidFill>
+          </a:ln>
+          <a:effectLst/>
+        </p:spPr>
+        <p:style>
+          <a:lnRef idx="1">
+            <a:schemeClr val="accent1"/>
+          </a:lnRef>
+          <a:fillRef idx="3">
+            <a:schemeClr val="accent1"/>
+          </a:fillRef>
+          <a:effectRef idx="2">
+            <a:schemeClr val="accent1"/>
+          </a:effectRef>
+          <a:fontRef idx="minor">
+            <a:schemeClr val="lt1"/>
+          </a:fontRef>
+        </p:style>
+        <p:txBody>
+          <a:bodyPr rtlCol="0" anchor="ctr"/>
+          <a:lstStyle/>
+          <a:p/>
+        </p:txBody>
+      </p:sp>
+      <p:sp>
+        <p:nvSpPr>
+          <p:cNvPr id="545" name="TextBox 544"/>
+          <p:cNvSpPr txBox="1"/>
+          <p:nvPr/>
+        </p:nvSpPr>
+        <p:spPr>
+          <a:xfrm>
+            <a:off x="2560320" y="1965960"/>
+            <a:ext cx="5029200" cy="603504"/>
+          </a:xfrm>
+          <a:prstGeom prst="rect">
+            <a:avLst/>
+          </a:prstGeom>
+          <a:noFill/>
+        </p:spPr>
+        <p:txBody>
+          <a:bodyPr wrap="square" anchor="ctr" lIns="0" rIns="0" tIns="0" bIns="0">
+            <a:spAutoFit/>
+          </a:bodyPr>
+          <a:lstStyle/>
+          <a:p>
+            <a:pPr algn="l">
+              <a:spcAft>
+                <a:spcPts val="400"/>
+              </a:spcAft>
+            </a:pPr>
+            <a:r>
+              <a:rPr sz="1000" b="0">
+                <a:solidFill>
+                  <a:srgbClr val="1A1A1A"/>
+                </a:solidFill>
+                <a:latin typeface="+mn-lt"/>
+              </a:rPr>
+              <a:t>Одна из крупнейших энергокомпаний России: 53 электростанции в 16 регионах. САПР используется для проектирования и модернизации энергообъектов.</a:t>
+            </a:r>
+          </a:p>
+        </p:txBody>
+      </p:sp>
+      <p:sp>
+        <p:nvSpPr>
+          <p:cNvPr id="546" name="Snip Single Corner Rectangle 545"/>
+          <p:cNvSpPr/>
+          <p:nvPr/>
+        </p:nvSpPr>
+        <p:spPr>
+          <a:xfrm>
+            <a:off x="594360" y="2624328"/>
+            <a:ext cx="1783080" cy="603504"/>
           </a:xfrm>
           <a:prstGeom prst="snip1Rect">
             <a:avLst/>
@@ -30770,37 +30967,36 @@
           <a:p>
             <a:pPr algn="l"/>
             <a:r>
-              <a:rPr sz="1200" b="1">
+              <a:rPr sz="1150" b="1">
                 <a:solidFill>
                   <a:srgbClr val="1A1A1A"/>
                 </a:solidFill>
                 <a:latin typeface="+mj-lt"/>
               </a:rPr>
-              <a:t>Контекст</a:t>
-            </a:r>
-          </a:p>
-        </p:txBody>
-      </p:sp>
-      <p:sp>
-        <p:nvSpPr>
-          <p:cNvPr id="545" name="Snip Single Corner Rectangle 544"/>
+              <a:t>Задача</a:t>
+            </a:r>
+          </a:p>
+        </p:txBody>
+      </p:sp>
+      <p:sp>
+        <p:nvSpPr>
+          <p:cNvPr id="547" name="Snip Single Corner Rectangle 546"/>
           <p:cNvSpPr/>
           <p:nvPr/>
         </p:nvSpPr>
         <p:spPr>
           <a:xfrm>
-            <a:off x="2606040" y="2011680"/>
-            <a:ext cx="5029200" cy="566928"/>
+            <a:off x="2450592" y="2624328"/>
+            <a:ext cx="5230368" cy="603504"/>
           </a:xfrm>
           <a:prstGeom prst="snip1Rect">
             <a:avLst/>
           </a:prstGeom>
           <a:noFill/>
-          <a:ln w="15875">
+          <a:ln w="12700">
             <a:solidFill>
               <a:srgbClr val="C9D3E0"/>
             </a:solidFill>
-            <a:prstDash val="dash"/>
           </a:ln>
           <a:effectLst/>
         </p:spPr>
@@ -30819,32 +31015,60 @@
           </a:fontRef>
         </p:style>
         <p:txBody>
-          <a:bodyPr rtlCol="0" anchor="ctr" lIns="73152" rIns="73152" tIns="0" bIns="0" wrap="square"/>
+          <a:bodyPr rtlCol="0" anchor="ctr"/>
           <a:lstStyle/>
-          <a:p>
-            <a:pPr algn="l"/>
-            <a:r>
-              <a:rPr sz="1050" b="0">
-                <a:solidFill>
-                  <a:srgbClr val="6B7280"/>
+          <a:p/>
+        </p:txBody>
+      </p:sp>
+      <p:sp>
+        <p:nvSpPr>
+          <p:cNvPr id="548" name="TextBox 547"/>
+          <p:cNvSpPr txBox="1"/>
+          <p:nvPr/>
+        </p:nvSpPr>
+        <p:spPr>
+          <a:xfrm>
+            <a:off x="2560320" y="2624328"/>
+            <a:ext cx="5029200" cy="603504"/>
+          </a:xfrm>
+          <a:prstGeom prst="rect">
+            <a:avLst/>
+          </a:prstGeom>
+          <a:noFill/>
+        </p:spPr>
+        <p:txBody>
+          <a:bodyPr wrap="square" anchor="ctr" lIns="0" rIns="0" tIns="0" bIns="0">
+            <a:spAutoFit/>
+          </a:bodyPr>
+          <a:lstStyle/>
+          <a:p>
+            <a:pPr algn="l">
+              <a:spcAft>
+                <a:spcPts val="400"/>
+              </a:spcAft>
+            </a:pPr>
+            <a:r>
+              <a:rPr sz="1000" b="0">
+                <a:solidFill>
+                  <a:srgbClr val="1A1A1A"/>
                 </a:solidFill>
                 <a:latin typeface="+mn-lt"/>
               </a:rPr>
-              <a:t>Объект, подразделения и исходный технологический процесс</a:t>
-            </a:r>
-          </a:p>
-        </p:txBody>
-      </p:sp>
-      <p:sp>
-        <p:nvSpPr>
-          <p:cNvPr id="546" name="Snip Single Corner Rectangle 545"/>
+              <a:t>Заменить AutoCAD после ухода с рынка, унифицировать разрозненные САПР, автоматизировать развёртывание и обновление ПО, получить единую систему управления лицензиями.</a:t>
+            </a:r>
+          </a:p>
+        </p:txBody>
+      </p:sp>
+      <p:sp>
+        <p:nvSpPr>
+          <p:cNvPr id="549" name="Snip Single Corner Rectangle 548"/>
           <p:cNvSpPr/>
           <p:nvPr/>
         </p:nvSpPr>
         <p:spPr>
           <a:xfrm>
-            <a:off x="594360" y="2670048"/>
-            <a:ext cx="1920240" cy="566928"/>
+            <a:off x="594360" y="3282696"/>
+            <a:ext cx="1783080" cy="603504"/>
           </a:xfrm>
           <a:prstGeom prst="snip1Rect">
             <a:avLst/>
@@ -30877,37 +31101,36 @@
           <a:p>
             <a:pPr algn="l"/>
             <a:r>
-              <a:rPr sz="1200" b="1">
+              <a:rPr sz="1150" b="1">
                 <a:solidFill>
                   <a:srgbClr val="1A1A1A"/>
                 </a:solidFill>
                 <a:latin typeface="+mj-lt"/>
               </a:rPr>
-              <a:t>Задача</a:t>
-            </a:r>
-          </a:p>
-        </p:txBody>
-      </p:sp>
-      <p:sp>
-        <p:nvSpPr>
-          <p:cNvPr id="547" name="Snip Single Corner Rectangle 546"/>
+              <a:t>ИТ-ландшафт</a:t>
+            </a:r>
+          </a:p>
+        </p:txBody>
+      </p:sp>
+      <p:sp>
+        <p:nvSpPr>
+          <p:cNvPr id="550" name="Snip Single Corner Rectangle 549"/>
           <p:cNvSpPr/>
           <p:nvPr/>
         </p:nvSpPr>
         <p:spPr>
           <a:xfrm>
-            <a:off x="2606040" y="2670048"/>
-            <a:ext cx="5029200" cy="566928"/>
+            <a:off x="2450592" y="3282696"/>
+            <a:ext cx="5230368" cy="603504"/>
           </a:xfrm>
           <a:prstGeom prst="snip1Rect">
             <a:avLst/>
           </a:prstGeom>
           <a:noFill/>
-          <a:ln w="15875">
+          <a:ln w="12700">
             <a:solidFill>
               <a:srgbClr val="C9D3E0"/>
             </a:solidFill>
-            <a:prstDash val="dash"/>
           </a:ln>
           <a:effectLst/>
         </p:spPr>
@@ -30926,32 +31149,60 @@
           </a:fontRef>
         </p:style>
         <p:txBody>
-          <a:bodyPr rtlCol="0" anchor="ctr" lIns="73152" rIns="73152" tIns="0" bIns="0" wrap="square"/>
+          <a:bodyPr rtlCol="0" anchor="ctr"/>
           <a:lstStyle/>
-          <a:p>
-            <a:pPr algn="l"/>
-            <a:r>
-              <a:rPr sz="1050" b="0">
-                <a:solidFill>
-                  <a:srgbClr val="6B7280"/>
+          <a:p/>
+        </p:txBody>
+      </p:sp>
+      <p:sp>
+        <p:nvSpPr>
+          <p:cNvPr id="551" name="TextBox 550"/>
+          <p:cNvSpPr txBox="1"/>
+          <p:nvPr/>
+        </p:nvSpPr>
+        <p:spPr>
+          <a:xfrm>
+            <a:off x="2560320" y="3282696"/>
+            <a:ext cx="5029200" cy="603504"/>
+          </a:xfrm>
+          <a:prstGeom prst="rect">
+            <a:avLst/>
+          </a:prstGeom>
+          <a:noFill/>
+        </p:spPr>
+        <p:txBody>
+          <a:bodyPr wrap="square" anchor="ctr" lIns="0" rIns="0" tIns="0" bIns="0">
+            <a:spAutoFit/>
+          </a:bodyPr>
+          <a:lstStyle/>
+          <a:p>
+            <a:pPr algn="l">
+              <a:spcAft>
+                <a:spcPts val="400"/>
+              </a:spcAft>
+            </a:pPr>
+            <a:r>
+              <a:rPr sz="1000" b="0">
+                <a:solidFill>
+                  <a:srgbClr val="1A1A1A"/>
                 </a:solidFill>
                 <a:latin typeface="+mn-lt"/>
               </a:rPr>
-              <a:t>Что требовалось изменить или проверить</a:t>
-            </a:r>
-          </a:p>
-        </p:txBody>
-      </p:sp>
-      <p:sp>
-        <p:nvSpPr>
-          <p:cNvPr id="548" name="Snip Single Corner Rectangle 547"/>
+              <a:t>Было: AutoCAD, Компас-3D и nanoCAD параллельно. Стало: Платформа nanoCAD с модулями и специализированными решениями «Стройплощадка» и «Металлоконструкции».</a:t>
+            </a:r>
+          </a:p>
+        </p:txBody>
+      </p:sp>
+      <p:sp>
+        <p:nvSpPr>
+          <p:cNvPr id="552" name="Snip Single Corner Rectangle 551"/>
           <p:cNvSpPr/>
           <p:nvPr/>
         </p:nvSpPr>
         <p:spPr>
           <a:xfrm>
-            <a:off x="594360" y="3328415"/>
-            <a:ext cx="1920240" cy="566928"/>
+            <a:off x="594360" y="3941063"/>
+            <a:ext cx="1783080" cy="603504"/>
           </a:xfrm>
           <a:prstGeom prst="snip1Rect">
             <a:avLst/>
@@ -30984,37 +31235,36 @@
           <a:p>
             <a:pPr algn="l"/>
             <a:r>
-              <a:rPr sz="1200" b="1">
+              <a:rPr sz="1150" b="1">
                 <a:solidFill>
                   <a:srgbClr val="1A1A1A"/>
                 </a:solidFill>
                 <a:latin typeface="+mj-lt"/>
               </a:rPr>
-              <a:t>ИТ-ландшафт</a:t>
-            </a:r>
-          </a:p>
-        </p:txBody>
-      </p:sp>
-      <p:sp>
-        <p:nvSpPr>
-          <p:cNvPr id="549" name="Snip Single Corner Rectangle 548"/>
+              <a:t>Роль Нормасофт</a:t>
+            </a:r>
+          </a:p>
+        </p:txBody>
+      </p:sp>
+      <p:sp>
+        <p:nvSpPr>
+          <p:cNvPr id="553" name="Snip Single Corner Rectangle 552"/>
           <p:cNvSpPr/>
           <p:nvPr/>
         </p:nvSpPr>
         <p:spPr>
           <a:xfrm>
-            <a:off x="2606040" y="3328415"/>
-            <a:ext cx="5029200" cy="566928"/>
+            <a:off x="2450592" y="3941063"/>
+            <a:ext cx="5230368" cy="603504"/>
           </a:xfrm>
           <a:prstGeom prst="snip1Rect">
             <a:avLst/>
           </a:prstGeom>
           <a:noFill/>
-          <a:ln w="15875">
+          <a:ln w="12700">
             <a:solidFill>
               <a:srgbClr val="C9D3E0"/>
             </a:solidFill>
-            <a:prstDash val="dash"/>
           </a:ln>
           <a:effectLst/>
         </p:spPr>
@@ -31033,32 +31283,194 @@
           </a:fontRef>
         </p:style>
         <p:txBody>
+          <a:bodyPr rtlCol="0" anchor="ctr"/>
+          <a:lstStyle/>
+          <a:p/>
+        </p:txBody>
+      </p:sp>
+      <p:sp>
+        <p:nvSpPr>
+          <p:cNvPr id="554" name="TextBox 553"/>
+          <p:cNvSpPr txBox="1"/>
+          <p:nvPr/>
+        </p:nvSpPr>
+        <p:spPr>
+          <a:xfrm>
+            <a:off x="2560320" y="3941063"/>
+            <a:ext cx="5029200" cy="603504"/>
+          </a:xfrm>
+          <a:prstGeom prst="rect">
+            <a:avLst/>
+          </a:prstGeom>
+          <a:noFill/>
+        </p:spPr>
+        <p:txBody>
+          <a:bodyPr wrap="square" anchor="ctr" lIns="0" rIns="0" tIns="0" bIns="0">
+            <a:spAutoFit/>
+          </a:bodyPr>
+          <a:lstStyle/>
+          <a:p>
+            <a:pPr algn="l">
+              <a:spcAft>
+                <a:spcPts val="400"/>
+              </a:spcAft>
+            </a:pPr>
+            <a:r>
+              <a:rPr sz="1000" b="0">
+                <a:solidFill>
+                  <a:srgbClr val="1A1A1A"/>
+                </a:solidFill>
+                <a:latin typeface="+mn-lt"/>
+              </a:rPr>
+              <a:t>Внедрение единой платформы, развёртывание сетевых лицензий, настройка централизованного управления лицензиями и обновлениями.</a:t>
+            </a:r>
+          </a:p>
+        </p:txBody>
+      </p:sp>
+      <p:sp>
+        <p:nvSpPr>
+          <p:cNvPr id="555" name="Snip Single Corner Rectangle 554"/>
+          <p:cNvSpPr/>
+          <p:nvPr/>
+        </p:nvSpPr>
+        <p:spPr>
+          <a:xfrm>
+            <a:off x="594360" y="4599431"/>
+            <a:ext cx="1783080" cy="603504"/>
+          </a:xfrm>
+          <a:prstGeom prst="snip1Rect">
+            <a:avLst/>
+          </a:prstGeom>
+          <a:solidFill>
+            <a:srgbClr val="0386FC"/>
+          </a:solidFill>
+          <a:ln>
+            <a:noFill/>
+          </a:ln>
+          <a:effectLst/>
+        </p:spPr>
+        <p:style>
+          <a:lnRef idx="1">
+            <a:schemeClr val="accent1"/>
+          </a:lnRef>
+          <a:fillRef idx="3">
+            <a:schemeClr val="accent1"/>
+          </a:fillRef>
+          <a:effectRef idx="2">
+            <a:schemeClr val="accent1"/>
+          </a:effectRef>
+          <a:fontRef idx="minor">
+            <a:schemeClr val="lt1"/>
+          </a:fontRef>
+        </p:style>
+        <p:txBody>
           <a:bodyPr rtlCol="0" anchor="ctr" lIns="73152" rIns="73152" tIns="0" bIns="0" wrap="square"/>
           <a:lstStyle/>
           <a:p>
             <a:pPr algn="l"/>
             <a:r>
-              <a:rPr sz="1050" b="0">
-                <a:solidFill>
-                  <a:srgbClr val="6B7280"/>
+              <a:rPr sz="1150" b="1">
+                <a:solidFill>
+                  <a:srgbClr val="FFFFFF"/>
+                </a:solidFill>
+                <a:latin typeface="+mj-lt"/>
+              </a:rPr>
+              <a:t>Результат</a:t>
+            </a:r>
+          </a:p>
+        </p:txBody>
+      </p:sp>
+      <p:sp>
+        <p:nvSpPr>
+          <p:cNvPr id="556" name="Snip Single Corner Rectangle 555"/>
+          <p:cNvSpPr/>
+          <p:nvPr/>
+        </p:nvSpPr>
+        <p:spPr>
+          <a:xfrm>
+            <a:off x="2450592" y="4599431"/>
+            <a:ext cx="5230368" cy="603504"/>
+          </a:xfrm>
+          <a:prstGeom prst="snip1Rect">
+            <a:avLst/>
+          </a:prstGeom>
+          <a:solidFill>
+            <a:srgbClr val="E3EFFE"/>
+          </a:solidFill>
+          <a:ln>
+            <a:noFill/>
+          </a:ln>
+          <a:effectLst/>
+        </p:spPr>
+        <p:style>
+          <a:lnRef idx="1">
+            <a:schemeClr val="accent1"/>
+          </a:lnRef>
+          <a:fillRef idx="3">
+            <a:schemeClr val="accent1"/>
+          </a:fillRef>
+          <a:effectRef idx="2">
+            <a:schemeClr val="accent1"/>
+          </a:effectRef>
+          <a:fontRef idx="minor">
+            <a:schemeClr val="lt1"/>
+          </a:fontRef>
+        </p:style>
+        <p:txBody>
+          <a:bodyPr rtlCol="0" anchor="ctr"/>
+          <a:lstStyle/>
+          <a:p/>
+        </p:txBody>
+      </p:sp>
+      <p:sp>
+        <p:nvSpPr>
+          <p:cNvPr id="557" name="TextBox 556"/>
+          <p:cNvSpPr txBox="1"/>
+          <p:nvPr/>
+        </p:nvSpPr>
+        <p:spPr>
+          <a:xfrm>
+            <a:off x="2560320" y="4599431"/>
+            <a:ext cx="5029200" cy="603504"/>
+          </a:xfrm>
+          <a:prstGeom prst="rect">
+            <a:avLst/>
+          </a:prstGeom>
+          <a:noFill/>
+        </p:spPr>
+        <p:txBody>
+          <a:bodyPr wrap="square" anchor="ctr" lIns="0" rIns="0" tIns="0" bIns="0">
+            <a:spAutoFit/>
+          </a:bodyPr>
+          <a:lstStyle/>
+          <a:p>
+            <a:pPr algn="l">
+              <a:spcAft>
+                <a:spcPts val="400"/>
+              </a:spcAft>
+            </a:pPr>
+            <a:r>
+              <a:rPr sz="1000" b="0">
+                <a:solidFill>
+                  <a:srgbClr val="1A1A1A"/>
                 </a:solidFill>
                 <a:latin typeface="+mn-lt"/>
               </a:rPr>
-              <a:t>Какие продукты и форматы уже использовались, что нужно было сохранить</a:t>
-            </a:r>
-          </a:p>
-        </p:txBody>
-      </p:sp>
-      <p:sp>
-        <p:nvSpPr>
-          <p:cNvPr id="550" name="Snip Single Corner Rectangle 549"/>
+              <a:t>Более 1 000 рабочих мест на одной платформе; ~245 сетевых лицензий с оптимизацией затрат; ниже издержки на управление ПО; безопасность данных и импортозамещение.</a:t>
+            </a:r>
+          </a:p>
+        </p:txBody>
+      </p:sp>
+      <p:sp>
+        <p:nvSpPr>
+          <p:cNvPr id="558" name="Snip Single Corner Rectangle 557"/>
           <p:cNvSpPr/>
           <p:nvPr/>
         </p:nvSpPr>
         <p:spPr>
           <a:xfrm>
-            <a:off x="594360" y="3986783"/>
-            <a:ext cx="1920240" cy="566928"/>
+            <a:off x="594360" y="5257799"/>
+            <a:ext cx="1783080" cy="603504"/>
           </a:xfrm>
           <a:prstGeom prst="snip1Rect">
             <a:avLst/>
@@ -31091,37 +31503,36 @@
           <a:p>
             <a:pPr algn="l"/>
             <a:r>
-              <a:rPr sz="1200" b="1">
+              <a:rPr sz="1150" b="1">
                 <a:solidFill>
                   <a:srgbClr val="1A1A1A"/>
                 </a:solidFill>
                 <a:latin typeface="+mj-lt"/>
               </a:rPr>
-              <a:t>Работа Нормасофт</a:t>
-            </a:r>
-          </a:p>
-        </p:txBody>
-      </p:sp>
-      <p:sp>
-        <p:nvSpPr>
-          <p:cNvPr id="551" name="Snip Single Corner Rectangle 550"/>
+              <a:t>Применимость</a:t>
+            </a:r>
+          </a:p>
+        </p:txBody>
+      </p:sp>
+      <p:sp>
+        <p:nvSpPr>
+          <p:cNvPr id="559" name="Snip Single Corner Rectangle 558"/>
           <p:cNvSpPr/>
           <p:nvPr/>
         </p:nvSpPr>
         <p:spPr>
           <a:xfrm>
-            <a:off x="2606040" y="3986783"/>
-            <a:ext cx="5029200" cy="566928"/>
+            <a:off x="2450592" y="5257799"/>
+            <a:ext cx="5230368" cy="603504"/>
           </a:xfrm>
           <a:prstGeom prst="snip1Rect">
             <a:avLst/>
           </a:prstGeom>
           <a:noFill/>
-          <a:ln w="15875">
+          <a:ln w="12700">
             <a:solidFill>
               <a:srgbClr val="C9D3E0"/>
             </a:solidFill>
-            <a:prstDash val="dash"/>
           </a:ln>
           <a:effectLst/>
         </p:spPr>
@@ -31140,38 +31551,66 @@
           </a:fontRef>
         </p:style>
         <p:txBody>
-          <a:bodyPr rtlCol="0" anchor="ctr" lIns="73152" rIns="73152" tIns="0" bIns="0" wrap="square"/>
+          <a:bodyPr rtlCol="0" anchor="ctr"/>
           <a:lstStyle/>
-          <a:p>
-            <a:pPr algn="l"/>
-            <a:r>
-              <a:rPr sz="1050" b="0">
-                <a:solidFill>
-                  <a:srgbClr val="6B7280"/>
+          <a:p/>
+        </p:txBody>
+      </p:sp>
+      <p:sp>
+        <p:nvSpPr>
+          <p:cNvPr id="560" name="TextBox 559"/>
+          <p:cNvSpPr txBox="1"/>
+          <p:nvPr/>
+        </p:nvSpPr>
+        <p:spPr>
+          <a:xfrm>
+            <a:off x="2560320" y="5257799"/>
+            <a:ext cx="5029200" cy="603504"/>
+          </a:xfrm>
+          <a:prstGeom prst="rect">
+            <a:avLst/>
+          </a:prstGeom>
+          <a:noFill/>
+        </p:spPr>
+        <p:txBody>
+          <a:bodyPr wrap="square" anchor="ctr" lIns="0" rIns="0" tIns="0" bIns="0">
+            <a:spAutoFit/>
+          </a:bodyPr>
+          <a:lstStyle/>
+          <a:p>
+            <a:pPr algn="l">
+              <a:spcAft>
+                <a:spcPts val="400"/>
+              </a:spcAft>
+            </a:pPr>
+            <a:r>
+              <a:rPr sz="1000" b="0">
+                <a:solidFill>
+                  <a:srgbClr val="1A1A1A"/>
                 </a:solidFill>
                 <a:latin typeface="+mn-lt"/>
               </a:rPr>
-              <a:t>Обследование, настройка, интеграция, обучение, пилот, передача требований разработчикам</a:t>
-            </a:r>
-          </a:p>
-        </p:txBody>
-      </p:sp>
-      <p:sp>
-        <p:nvSpPr>
-          <p:cNvPr id="552" name="Snip Single Corner Rectangle 551"/>
+              <a:t>Инвентаризация и унификация ПО, переход на сетевое лицензирование — прямые выводы технического аудита ПО и матрицы импортозамещения.</a:t>
+            </a:r>
+          </a:p>
+        </p:txBody>
+      </p:sp>
+      <p:sp>
+        <p:nvSpPr>
+          <p:cNvPr id="561" name="Snip Single Corner Rectangle 560"/>
           <p:cNvSpPr/>
           <p:nvPr/>
         </p:nvSpPr>
         <p:spPr>
           <a:xfrm>
-            <a:off x="594360" y="4645151"/>
-            <a:ext cx="1920240" cy="566928"/>
+            <a:off x="7863840" y="1965960"/>
+            <a:ext cx="3611880" cy="1188720"/>
           </a:xfrm>
           <a:prstGeom prst="snip1Rect">
             <a:avLst/>
           </a:prstGeom>
           <a:solidFill>
-            <a:srgbClr val="0386FC"/>
+            <a:srgbClr val="F1F3F6"/>
           </a:solidFill>
           <a:ln>
             <a:noFill/>
@@ -31193,42 +31632,108 @@
           </a:fontRef>
         </p:style>
         <p:txBody>
-          <a:bodyPr rtlCol="0" anchor="ctr" lIns="73152" rIns="73152" tIns="0" bIns="0" wrap="square"/>
+          <a:bodyPr rtlCol="0" anchor="ctr"/>
           <a:lstStyle/>
-          <a:p>
-            <a:pPr algn="l"/>
-            <a:r>
-              <a:rPr sz="1200" b="1">
-                <a:solidFill>
-                  <a:srgbClr val="FFFFFF"/>
+          <a:p/>
+        </p:txBody>
+      </p:sp>
+      <p:sp>
+        <p:nvSpPr>
+          <p:cNvPr id="562" name="TextBox 561"/>
+          <p:cNvSpPr txBox="1"/>
+          <p:nvPr/>
+        </p:nvSpPr>
+        <p:spPr>
+          <a:xfrm>
+            <a:off x="8092440" y="2075688"/>
+            <a:ext cx="3200400" cy="548640"/>
+          </a:xfrm>
+          <a:prstGeom prst="rect">
+            <a:avLst/>
+          </a:prstGeom>
+          <a:noFill/>
+        </p:spPr>
+        <p:txBody>
+          <a:bodyPr wrap="square" anchor="t" lIns="0" rIns="0" tIns="0" bIns="0">
+            <a:spAutoFit/>
+          </a:bodyPr>
+          <a:lstStyle/>
+          <a:p>
+            <a:pPr algn="l">
+              <a:spcAft>
+                <a:spcPts val="400"/>
+              </a:spcAft>
+            </a:pPr>
+            <a:r>
+              <a:rPr sz="3000" b="1">
+                <a:solidFill>
+                  <a:srgbClr val="0386FC"/>
                 </a:solidFill>
                 <a:latin typeface="+mj-lt"/>
               </a:rPr>
-              <a:t>Результат</a:t>
-            </a:r>
-          </a:p>
-        </p:txBody>
-      </p:sp>
-      <p:sp>
-        <p:nvSpPr>
-          <p:cNvPr id="553" name="Snip Single Corner Rectangle 552"/>
+              <a:t>1 000+</a:t>
+            </a:r>
+          </a:p>
+        </p:txBody>
+      </p:sp>
+      <p:sp>
+        <p:nvSpPr>
+          <p:cNvPr id="563" name="TextBox 562"/>
+          <p:cNvSpPr txBox="1"/>
+          <p:nvPr/>
+        </p:nvSpPr>
+        <p:spPr>
+          <a:xfrm>
+            <a:off x="8092440" y="2679191"/>
+            <a:ext cx="3200400" cy="411480"/>
+          </a:xfrm>
+          <a:prstGeom prst="rect">
+            <a:avLst/>
+          </a:prstGeom>
+          <a:noFill/>
+        </p:spPr>
+        <p:txBody>
+          <a:bodyPr wrap="square" anchor="t" lIns="0" rIns="0" tIns="0" bIns="0">
+            <a:spAutoFit/>
+          </a:bodyPr>
+          <a:lstStyle/>
+          <a:p>
+            <a:pPr algn="l">
+              <a:spcAft>
+                <a:spcPts val="400"/>
+              </a:spcAft>
+            </a:pPr>
+            <a:r>
+              <a:rPr sz="1100" b="0">
+                <a:solidFill>
+                  <a:srgbClr val="1A1A1A"/>
+                </a:solidFill>
+                <a:latin typeface="+mn-lt"/>
+              </a:rPr>
+              <a:t>рабочих мест на единой платформе</a:t>
+            </a:r>
+          </a:p>
+        </p:txBody>
+      </p:sp>
+      <p:sp>
+        <p:nvSpPr>
+          <p:cNvPr id="564" name="Snip Single Corner Rectangle 563"/>
           <p:cNvSpPr/>
           <p:nvPr/>
         </p:nvSpPr>
         <p:spPr>
           <a:xfrm>
-            <a:off x="2606040" y="4645151"/>
-            <a:ext cx="5029200" cy="566928"/>
+            <a:off x="7863840" y="3282696"/>
+            <a:ext cx="3611880" cy="1188720"/>
           </a:xfrm>
           <a:prstGeom prst="snip1Rect">
             <a:avLst/>
           </a:prstGeom>
-          <a:noFill/>
-          <a:ln w="15875">
-            <a:solidFill>
-              <a:srgbClr val="C9D3E0"/>
-            </a:solidFill>
-            <a:prstDash val="dash"/>
+          <a:solidFill>
+            <a:srgbClr val="F1F3F6"/>
+          </a:solidFill>
+          <a:ln>
+            <a:noFill/>
           </a:ln>
           <a:effectLst/>
         </p:spPr>
@@ -31247,32 +31752,99 @@
           </a:fontRef>
         </p:style>
         <p:txBody>
-          <a:bodyPr rtlCol="0" anchor="ctr" lIns="73152" rIns="73152" tIns="0" bIns="0" wrap="square"/>
+          <a:bodyPr rtlCol="0" anchor="ctr"/>
           <a:lstStyle/>
-          <a:p>
-            <a:pPr algn="l"/>
-            <a:r>
-              <a:rPr sz="1050" b="0">
-                <a:solidFill>
-                  <a:srgbClr val="6B7280"/>
+          <a:p/>
+        </p:txBody>
+      </p:sp>
+      <p:sp>
+        <p:nvSpPr>
+          <p:cNvPr id="565" name="TextBox 564"/>
+          <p:cNvSpPr txBox="1"/>
+          <p:nvPr/>
+        </p:nvSpPr>
+        <p:spPr>
+          <a:xfrm>
+            <a:off x="8092440" y="3392424"/>
+            <a:ext cx="3200400" cy="548640"/>
+          </a:xfrm>
+          <a:prstGeom prst="rect">
+            <a:avLst/>
+          </a:prstGeom>
+          <a:noFill/>
+        </p:spPr>
+        <p:txBody>
+          <a:bodyPr wrap="square" anchor="t" lIns="0" rIns="0" tIns="0" bIns="0">
+            <a:spAutoFit/>
+          </a:bodyPr>
+          <a:lstStyle/>
+          <a:p>
+            <a:pPr algn="l">
+              <a:spcAft>
+                <a:spcPts val="400"/>
+              </a:spcAft>
+            </a:pPr>
+            <a:r>
+              <a:rPr sz="3000" b="1">
+                <a:solidFill>
+                  <a:srgbClr val="0386FC"/>
+                </a:solidFill>
+                <a:latin typeface="+mj-lt"/>
+              </a:rPr>
+              <a:t>~245</a:t>
+            </a:r>
+          </a:p>
+        </p:txBody>
+      </p:sp>
+      <p:sp>
+        <p:nvSpPr>
+          <p:cNvPr id="566" name="TextBox 565"/>
+          <p:cNvSpPr txBox="1"/>
+          <p:nvPr/>
+        </p:nvSpPr>
+        <p:spPr>
+          <a:xfrm>
+            <a:off x="8092440" y="3995928"/>
+            <a:ext cx="3200400" cy="411480"/>
+          </a:xfrm>
+          <a:prstGeom prst="rect">
+            <a:avLst/>
+          </a:prstGeom>
+          <a:noFill/>
+        </p:spPr>
+        <p:txBody>
+          <a:bodyPr wrap="square" anchor="t" lIns="0" rIns="0" tIns="0" bIns="0">
+            <a:spAutoFit/>
+          </a:bodyPr>
+          <a:lstStyle/>
+          <a:p>
+            <a:pPr algn="l">
+              <a:spcAft>
+                <a:spcPts val="400"/>
+              </a:spcAft>
+            </a:pPr>
+            <a:r>
+              <a:rPr sz="1100" b="0">
+                <a:solidFill>
+                  <a:srgbClr val="1A1A1A"/>
                 </a:solidFill>
                 <a:latin typeface="+mn-lt"/>
               </a:rPr>
-              <a:t>Что заказчик смог сделать сам; какие документы или модели получил; что осталось в бэклоге</a:t>
-            </a:r>
-          </a:p>
-        </p:txBody>
-      </p:sp>
-      <p:sp>
-        <p:nvSpPr>
-          <p:cNvPr id="554" name="Snip Single Corner Rectangle 553"/>
+              <a:t>сетевых лицензий</a:t>
+            </a:r>
+          </a:p>
+        </p:txBody>
+      </p:sp>
+      <p:sp>
+        <p:nvSpPr>
+          <p:cNvPr id="567" name="Snip Single Corner Rectangle 566"/>
           <p:cNvSpPr/>
           <p:nvPr/>
         </p:nvSpPr>
         <p:spPr>
           <a:xfrm>
-            <a:off x="594360" y="5303519"/>
-            <a:ext cx="1920240" cy="566928"/>
+            <a:off x="7863840" y="4599431"/>
+            <a:ext cx="3611880" cy="1188720"/>
           </a:xfrm>
           <a:prstGeom prst="snip1Rect">
             <a:avLst/>
@@ -31300,42 +31872,108 @@
           </a:fontRef>
         </p:style>
         <p:txBody>
-          <a:bodyPr rtlCol="0" anchor="ctr" lIns="73152" rIns="73152" tIns="0" bIns="0" wrap="square"/>
+          <a:bodyPr rtlCol="0" anchor="ctr"/>
           <a:lstStyle/>
-          <a:p>
-            <a:pPr algn="l"/>
-            <a:r>
-              <a:rPr sz="1200" b="1">
+          <a:p/>
+        </p:txBody>
+      </p:sp>
+      <p:sp>
+        <p:nvSpPr>
+          <p:cNvPr id="568" name="TextBox 567"/>
+          <p:cNvSpPr txBox="1"/>
+          <p:nvPr/>
+        </p:nvSpPr>
+        <p:spPr>
+          <a:xfrm>
+            <a:off x="8092440" y="4709159"/>
+            <a:ext cx="3200400" cy="548640"/>
+          </a:xfrm>
+          <a:prstGeom prst="rect">
+            <a:avLst/>
+          </a:prstGeom>
+          <a:noFill/>
+        </p:spPr>
+        <p:txBody>
+          <a:bodyPr wrap="square" anchor="t" lIns="0" rIns="0" tIns="0" bIns="0">
+            <a:spAutoFit/>
+          </a:bodyPr>
+          <a:lstStyle/>
+          <a:p>
+            <a:pPr algn="l">
+              <a:spcAft>
+                <a:spcPts val="400"/>
+              </a:spcAft>
+            </a:pPr>
+            <a:r>
+              <a:rPr sz="3000" b="1">
+                <a:solidFill>
+                  <a:srgbClr val="0386FC"/>
+                </a:solidFill>
+                <a:latin typeface="+mj-lt"/>
+              </a:rPr>
+              <a:t>53</a:t>
+            </a:r>
+          </a:p>
+        </p:txBody>
+      </p:sp>
+      <p:sp>
+        <p:nvSpPr>
+          <p:cNvPr id="569" name="TextBox 568"/>
+          <p:cNvSpPr txBox="1"/>
+          <p:nvPr/>
+        </p:nvSpPr>
+        <p:spPr>
+          <a:xfrm>
+            <a:off x="8092440" y="5312664"/>
+            <a:ext cx="3200400" cy="411480"/>
+          </a:xfrm>
+          <a:prstGeom prst="rect">
+            <a:avLst/>
+          </a:prstGeom>
+          <a:noFill/>
+        </p:spPr>
+        <p:txBody>
+          <a:bodyPr wrap="square" anchor="t" lIns="0" rIns="0" tIns="0" bIns="0">
+            <a:spAutoFit/>
+          </a:bodyPr>
+          <a:lstStyle/>
+          <a:p>
+            <a:pPr algn="l">
+              <a:spcAft>
+                <a:spcPts val="400"/>
+              </a:spcAft>
+            </a:pPr>
+            <a:r>
+              <a:rPr sz="1100" b="0">
                 <a:solidFill>
                   <a:srgbClr val="1A1A1A"/>
                 </a:solidFill>
-                <a:latin typeface="+mj-lt"/>
-              </a:rPr>
-              <a:t>Применимость</a:t>
-            </a:r>
-          </a:p>
-        </p:txBody>
-      </p:sp>
-      <p:sp>
-        <p:nvSpPr>
-          <p:cNvPr id="555" name="Snip Single Corner Rectangle 554"/>
+                <a:latin typeface="+mn-lt"/>
+              </a:rPr>
+              <a:t>электростанции в 16 регионах</a:t>
+            </a:r>
+          </a:p>
+        </p:txBody>
+      </p:sp>
+      <p:sp>
+        <p:nvSpPr>
+          <p:cNvPr id="570" name="nav">
+            <a:hlinkClick action="ppaction://hlinksldjump" r:id="rId13"/>
+          </p:cNvPr>
           <p:cNvSpPr/>
           <p:nvPr/>
         </p:nvSpPr>
         <p:spPr>
           <a:xfrm>
-            <a:off x="2606040" y="5303519"/>
-            <a:ext cx="5029200" cy="566928"/>
+            <a:off x="932688" y="429768"/>
+            <a:ext cx="1385316" cy="338328"/>
           </a:xfrm>
           <a:prstGeom prst="snip1Rect">
             <a:avLst/>
           </a:prstGeom>
           <a:noFill/>
-          <a:ln w="15875">
-            <a:solidFill>
-              <a:srgbClr val="C9D3E0"/>
-            </a:solidFill>
-            <a:prstDash val="dash"/>
+          <a:ln>
+            <a:noFill/>
           </a:ln>
           <a:effectLst/>
         </p:spPr>
@@ -31357,41 +31995,38 @@
           <a:bodyPr rtlCol="0" anchor="ctr" lIns="73152" rIns="73152" tIns="0" bIns="0" wrap="square"/>
           <a:lstStyle/>
           <a:p>
-            <a:pPr algn="l"/>
-            <a:r>
-              <a:rPr sz="1050" b="0">
-                <a:solidFill>
-                  <a:srgbClr val="6B7280"/>
-                </a:solidFill>
-                <a:latin typeface="+mn-lt"/>
-              </a:rPr>
-              <a:t>Что из кейса можно применить в вашей организации</a:t>
-            </a:r>
-          </a:p>
-        </p:txBody>
-      </p:sp>
-      <p:sp>
-        <p:nvSpPr>
-          <p:cNvPr id="556" name="Snip Single Corner Rectangle 555"/>
+            <a:pPr algn="ctr"/>
+            <a:r>
+              <a:rPr sz="1100" b="0">
+                <a:solidFill>
+                  <a:srgbClr val="FFFFFF"/>
+                </a:solidFill>
+                <a:latin typeface="Manrope"/>
+              </a:rPr>
+              <a:t>ЗАЧЕМ АУДИТ</a:t>
+            </a:r>
+          </a:p>
+        </p:txBody>
+      </p:sp>
+      <p:sp>
+        <p:nvSpPr>
+          <p:cNvPr id="571" name="nav">
+            <a:hlinkClick action="ppaction://hlinksldjump" r:id="rId5"/>
+          </p:cNvPr>
           <p:cNvSpPr/>
           <p:nvPr/>
         </p:nvSpPr>
         <p:spPr>
           <a:xfrm>
-            <a:off x="7863840" y="2011680"/>
-            <a:ext cx="3611880" cy="3877056"/>
+            <a:off x="2409444" y="429768"/>
+            <a:ext cx="809244" cy="338328"/>
           </a:xfrm>
           <a:prstGeom prst="snip1Rect">
             <a:avLst/>
           </a:prstGeom>
-          <a:solidFill>
-            <a:srgbClr val="F1F3F6"/>
-          </a:solidFill>
-          <a:ln w="15875">
-            <a:solidFill>
-              <a:srgbClr val="C9D3E0"/>
-            </a:solidFill>
-            <a:prstDash val="dash"/>
+          <a:noFill/>
+          <a:ln>
+            <a:noFill/>
           </a:ln>
           <a:effectLst/>
         </p:spPr>
@@ -31415,29 +32050,29 @@
           <a:p>
             <a:pPr algn="ctr"/>
             <a:r>
-              <a:rPr sz="1200" b="0">
-                <a:solidFill>
-                  <a:srgbClr val="6B7280"/>
-                </a:solidFill>
-                <a:latin typeface="+mn-lt"/>
-              </a:rPr>
-              <a:t>Изображение объекта или фрагмент карты ИТ-ландшафта</a:t>
-            </a:r>
-          </a:p>
-        </p:txBody>
-      </p:sp>
-      <p:sp>
-        <p:nvSpPr>
-          <p:cNvPr id="557" name="nav">
-            <a:hlinkClick action="ppaction://hlinksldjump" r:id="rId13"/>
+              <a:rPr sz="1100" b="0">
+                <a:solidFill>
+                  <a:srgbClr val="FFFFFF"/>
+                </a:solidFill>
+                <a:latin typeface="Manrope"/>
+              </a:rPr>
+              <a:t>ЭТАПЫ</a:t>
+            </a:r>
+          </a:p>
+        </p:txBody>
+      </p:sp>
+      <p:sp>
+        <p:nvSpPr>
+          <p:cNvPr id="572" name="nav">
+            <a:hlinkClick action="ppaction://hlinksldjump" r:id="rId4"/>
           </p:cNvPr>
           <p:cNvSpPr/>
           <p:nvPr/>
         </p:nvSpPr>
         <p:spPr>
           <a:xfrm>
-            <a:off x="932688" y="429768"/>
-            <a:ext cx="1385316" cy="338328"/>
+            <a:off x="3310128" y="429768"/>
+            <a:ext cx="1193292" cy="338328"/>
           </a:xfrm>
           <a:prstGeom prst="snip1Rect">
             <a:avLst/>
@@ -31474,28 +32109,30 @@
                 </a:solidFill>
                 <a:latin typeface="Manrope"/>
               </a:rPr>
-              <a:t>ЗАЧЕМ АУДИТ</a:t>
-            </a:r>
-          </a:p>
-        </p:txBody>
-      </p:sp>
-      <p:sp>
-        <p:nvSpPr>
-          <p:cNvPr id="558" name="nav">
-            <a:hlinkClick action="ppaction://hlinksldjump" r:id="rId5"/>
+              <a:t>РЕЗУЛЬТАТ</a:t>
+            </a:r>
+          </a:p>
+        </p:txBody>
+      </p:sp>
+      <p:sp>
+        <p:nvSpPr>
+          <p:cNvPr id="573" name="nav">
+            <a:hlinkClick action="ppaction://hlinksldjump" r:id="rId16"/>
           </p:cNvPr>
           <p:cNvSpPr/>
           <p:nvPr/>
         </p:nvSpPr>
         <p:spPr>
           <a:xfrm>
-            <a:off x="2409444" y="429768"/>
+            <a:off x="4594860" y="429768"/>
             <a:ext cx="809244" cy="338328"/>
           </a:xfrm>
           <a:prstGeom prst="snip1Rect">
             <a:avLst/>
           </a:prstGeom>
-          <a:noFill/>
+          <a:solidFill>
+            <a:srgbClr val="FFFFFF"/>
+          </a:solidFill>
           <a:ln>
             <a:noFill/>
           </a:ln>
@@ -31523,26 +32160,26 @@
             <a:r>
               <a:rPr sz="1100" b="0">
                 <a:solidFill>
-                  <a:srgbClr val="FFFFFF"/>
+                  <a:srgbClr val="0386FC"/>
                 </a:solidFill>
                 <a:latin typeface="Manrope"/>
               </a:rPr>
-              <a:t>ЭТАПЫ</a:t>
-            </a:r>
-          </a:p>
-        </p:txBody>
-      </p:sp>
-      <p:sp>
-        <p:nvSpPr>
-          <p:cNvPr id="559" name="nav">
-            <a:hlinkClick action="ppaction://hlinksldjump" r:id="rId4"/>
+              <a:t>КЕЙСЫ</a:t>
+            </a:r>
+          </a:p>
+        </p:txBody>
+      </p:sp>
+      <p:sp>
+        <p:nvSpPr>
+          <p:cNvPr id="574" name="nav">
+            <a:hlinkClick action="ppaction://hlinksldjump" r:id="rId3"/>
           </p:cNvPr>
           <p:cNvSpPr/>
           <p:nvPr/>
         </p:nvSpPr>
         <p:spPr>
           <a:xfrm>
-            <a:off x="3310128" y="429768"/>
+            <a:off x="5495544" y="429768"/>
             <a:ext cx="1193292" cy="338328"/>
           </a:xfrm>
           <a:prstGeom prst="snip1Rect">
@@ -31580,30 +32217,28 @@
                 </a:solidFill>
                 <a:latin typeface="Manrope"/>
               </a:rPr>
-              <a:t>РЕЗУЛЬТАТ</a:t>
-            </a:r>
-          </a:p>
-        </p:txBody>
-      </p:sp>
-      <p:sp>
-        <p:nvSpPr>
-          <p:cNvPr id="560" name="nav">
-            <a:hlinkClick action="ppaction://hlinksldjump" r:id="rId16"/>
+              <a:t>ВНЕДРЕНИЕ</a:t>
+            </a:r>
+          </a:p>
+        </p:txBody>
+      </p:sp>
+      <p:sp>
+        <p:nvSpPr>
+          <p:cNvPr id="575" name="nav">
+            <a:hlinkClick action="ppaction://hlinksldjump" r:id="rId2"/>
           </p:cNvPr>
           <p:cNvSpPr/>
           <p:nvPr/>
         </p:nvSpPr>
         <p:spPr>
           <a:xfrm>
-            <a:off x="4594860" y="429768"/>
-            <a:ext cx="809244" cy="338328"/>
+            <a:off x="6780276" y="429768"/>
+            <a:ext cx="1193292" cy="338328"/>
           </a:xfrm>
           <a:prstGeom prst="snip1Rect">
             <a:avLst/>
           </a:prstGeom>
-          <a:solidFill>
-            <a:srgbClr val="FFFFFF"/>
-          </a:solidFill>
+          <a:noFill/>
           <a:ln>
             <a:noFill/>
           </a:ln>
@@ -31631,27 +32266,27 @@
             <a:r>
               <a:rPr sz="1100" b="0">
                 <a:solidFill>
-                  <a:srgbClr val="0386FC"/>
+                  <a:srgbClr val="FFFFFF"/>
                 </a:solidFill>
                 <a:latin typeface="Manrope"/>
               </a:rPr>
-              <a:t>КЕЙСЫ</a:t>
-            </a:r>
-          </a:p>
-        </p:txBody>
-      </p:sp>
-      <p:sp>
-        <p:nvSpPr>
-          <p:cNvPr id="561" name="nav">
-            <a:hlinkClick action="ppaction://hlinksldjump" r:id="rId3"/>
+              <a:t>НОРМАСОФТ</a:t>
+            </a:r>
+          </a:p>
+        </p:txBody>
+      </p:sp>
+      <p:sp>
+        <p:nvSpPr>
+          <p:cNvPr id="576" name="nav">
+            <a:hlinkClick action="ppaction://hlinksldjump" r:id="rId17"/>
           </p:cNvPr>
           <p:cNvSpPr/>
           <p:nvPr/>
         </p:nvSpPr>
         <p:spPr>
           <a:xfrm>
-            <a:off x="5495544" y="429768"/>
-            <a:ext cx="1193292" cy="338328"/>
+            <a:off x="8065008" y="429768"/>
+            <a:ext cx="1289304" cy="338328"/>
           </a:xfrm>
           <a:prstGeom prst="snip1Rect">
             <a:avLst/>
@@ -31688,112 +32323,6 @@
                 </a:solidFill>
                 <a:latin typeface="Manrope"/>
               </a:rPr>
-              <a:t>ВНЕДРЕНИЕ</a:t>
-            </a:r>
-          </a:p>
-        </p:txBody>
-      </p:sp>
-      <p:sp>
-        <p:nvSpPr>
-          <p:cNvPr id="562" name="nav">
-            <a:hlinkClick action="ppaction://hlinksldjump" r:id="rId2"/>
-          </p:cNvPr>
-          <p:cNvSpPr/>
-          <p:nvPr/>
-        </p:nvSpPr>
-        <p:spPr>
-          <a:xfrm>
-            <a:off x="6780276" y="429768"/>
-            <a:ext cx="1193292" cy="338328"/>
-          </a:xfrm>
-          <a:prstGeom prst="snip1Rect">
-            <a:avLst/>
-          </a:prstGeom>
-          <a:noFill/>
-          <a:ln>
-            <a:noFill/>
-          </a:ln>
-          <a:effectLst/>
-        </p:spPr>
-        <p:style>
-          <a:lnRef idx="1">
-            <a:schemeClr val="accent1"/>
-          </a:lnRef>
-          <a:fillRef idx="3">
-            <a:schemeClr val="accent1"/>
-          </a:fillRef>
-          <a:effectRef idx="2">
-            <a:schemeClr val="accent1"/>
-          </a:effectRef>
-          <a:fontRef idx="minor">
-            <a:schemeClr val="lt1"/>
-          </a:fontRef>
-        </p:style>
-        <p:txBody>
-          <a:bodyPr rtlCol="0" anchor="ctr" lIns="73152" rIns="73152" tIns="0" bIns="0" wrap="square"/>
-          <a:lstStyle/>
-          <a:p>
-            <a:pPr algn="ctr"/>
-            <a:r>
-              <a:rPr sz="1100" b="0">
-                <a:solidFill>
-                  <a:srgbClr val="FFFFFF"/>
-                </a:solidFill>
-                <a:latin typeface="Manrope"/>
-              </a:rPr>
-              <a:t>НОРМАСОФТ</a:t>
-            </a:r>
-          </a:p>
-        </p:txBody>
-      </p:sp>
-      <p:sp>
-        <p:nvSpPr>
-          <p:cNvPr id="563" name="nav">
-            <a:hlinkClick action="ppaction://hlinksldjump" r:id="rId17"/>
-          </p:cNvPr>
-          <p:cNvSpPr/>
-          <p:nvPr/>
-        </p:nvSpPr>
-        <p:spPr>
-          <a:xfrm>
-            <a:off x="8065008" y="429768"/>
-            <a:ext cx="1289304" cy="338328"/>
-          </a:xfrm>
-          <a:prstGeom prst="snip1Rect">
-            <a:avLst/>
-          </a:prstGeom>
-          <a:noFill/>
-          <a:ln>
-            <a:noFill/>
-          </a:ln>
-          <a:effectLst/>
-        </p:spPr>
-        <p:style>
-          <a:lnRef idx="1">
-            <a:schemeClr val="accent1"/>
-          </a:lnRef>
-          <a:fillRef idx="3">
-            <a:schemeClr val="accent1"/>
-          </a:fillRef>
-          <a:effectRef idx="2">
-            <a:schemeClr val="accent1"/>
-          </a:effectRef>
-          <a:fontRef idx="minor">
-            <a:schemeClr val="lt1"/>
-          </a:fontRef>
-        </p:style>
-        <p:txBody>
-          <a:bodyPr rtlCol="0" anchor="ctr" lIns="73152" rIns="73152" tIns="0" bIns="0" wrap="square"/>
-          <a:lstStyle/>
-          <a:p>
-            <a:pPr algn="ctr"/>
-            <a:r>
-              <a:rPr sz="1100" b="0">
-                <a:solidFill>
-                  <a:srgbClr val="FFFFFF"/>
-                </a:solidFill>
-                <a:latin typeface="Manrope"/>
-              </a:rPr>
               <a:t>ОБСУЖДЕНИЕ</a:t>
             </a:r>
           </a:p>
@@ -31801,7 +32330,7 @@
       </p:sp>
       <p:sp>
         <p:nvSpPr>
-          <p:cNvPr id="564" name="nav">
+          <p:cNvPr id="577" name="nav">
             <a:hlinkClick action="ppaction://hlinksldjump" r:id="rId10"/>
           </p:cNvPr>
           <p:cNvSpPr/>
@@ -32007,7 +32536,7 @@
                 <a:uFillTx/>
                 <a:latin typeface="+mj-lt"/>
               </a:rPr>
-              <a:t>Кейс 3: [заказчик] — [объект / задача]</a:t>
+              <a:t>Кейс 3: СМК «Генезис» — контроль монтажа фасадов</a:t>
             </a:r>
             <a:endParaRPr lang="ru-RU" sz="2600" b="0" u="none" strike="noStrike">
               <a:solidFill>
@@ -32091,7 +32620,7 @@
       <p:sp>
         <p:nvSpPr>
           <p:cNvPr id="539" name="Google Shape;269;p32">
-            <a:hlinkClick action="ppaction://hlinksldjump" r:id="rId12"/>
+            <a:hlinkClick action="ppaction://hlinksldjump" r:id="rId13"/>
           </p:cNvPr>
           <p:cNvSpPr/>
           <p:nvPr/>
@@ -32445,17 +32974,17 @@
         </p:nvSpPr>
         <p:spPr>
           <a:xfrm>
-            <a:off x="9464040" y="1389888"/>
-            <a:ext cx="2011680" cy="365760"/>
+            <a:off x="594360" y="1965960"/>
+            <a:ext cx="1783080" cy="603504"/>
           </a:xfrm>
           <a:prstGeom prst="snip1Rect">
             <a:avLst/>
           </a:prstGeom>
-          <a:noFill/>
-          <a:ln w="12700">
-            <a:solidFill>
-              <a:srgbClr val="0386FC"/>
-            </a:solidFill>
+          <a:solidFill>
+            <a:srgbClr val="F1F3F6"/>
+          </a:solidFill>
+          <a:ln>
+            <a:noFill/>
           </a:ln>
           <a:effectLst/>
         </p:spPr>
@@ -32477,15 +33006,15 @@
           <a:bodyPr rtlCol="0" anchor="ctr" lIns="73152" rIns="73152" tIns="0" bIns="0" wrap="square"/>
           <a:lstStyle/>
           <a:p>
-            <a:pPr algn="ctr"/>
-            <a:r>
-              <a:rPr sz="1000" b="0">
-                <a:solidFill>
-                  <a:srgbClr val="0386FC"/>
-                </a:solidFill>
-                <a:latin typeface="+mn-lt"/>
-              </a:rPr>
-              <a:t>МАТЕРИАЛЫ ГОТОВЯТСЯ</a:t>
+            <a:pPr algn="l"/>
+            <a:r>
+              <a:rPr sz="1150" b="1">
+                <a:solidFill>
+                  <a:srgbClr val="1A1A1A"/>
+                </a:solidFill>
+                <a:latin typeface="+mj-lt"/>
+              </a:rPr>
+              <a:t>Контекст</a:t>
             </a:r>
           </a:p>
         </p:txBody>
@@ -32498,8 +33027,89 @@
         </p:nvSpPr>
         <p:spPr>
           <a:xfrm>
-            <a:off x="594360" y="2011680"/>
-            <a:ext cx="1920240" cy="566928"/>
+            <a:off x="2450592" y="1965960"/>
+            <a:ext cx="5230368" cy="603504"/>
+          </a:xfrm>
+          <a:prstGeom prst="snip1Rect">
+            <a:avLst/>
+          </a:prstGeom>
+          <a:noFill/>
+          <a:ln w="12700">
+            <a:solidFill>
+              <a:srgbClr val="C9D3E0"/>
+            </a:solidFill>
+          </a:ln>
+          <a:effectLst/>
+        </p:spPr>
+        <p:style>
+          <a:lnRef idx="1">
+            <a:schemeClr val="accent1"/>
+          </a:lnRef>
+          <a:fillRef idx="3">
+            <a:schemeClr val="accent1"/>
+          </a:fillRef>
+          <a:effectRef idx="2">
+            <a:schemeClr val="accent1"/>
+          </a:effectRef>
+          <a:fontRef idx="minor">
+            <a:schemeClr val="lt1"/>
+          </a:fontRef>
+        </p:style>
+        <p:txBody>
+          <a:bodyPr rtlCol="0" anchor="ctr"/>
+          <a:lstStyle/>
+          <a:p/>
+        </p:txBody>
+      </p:sp>
+      <p:sp>
+        <p:nvSpPr>
+          <p:cNvPr id="545" name="TextBox 544"/>
+          <p:cNvSpPr txBox="1"/>
+          <p:nvPr/>
+        </p:nvSpPr>
+        <p:spPr>
+          <a:xfrm>
+            <a:off x="2560320" y="1965960"/>
+            <a:ext cx="5029200" cy="603504"/>
+          </a:xfrm>
+          <a:prstGeom prst="rect">
+            <a:avLst/>
+          </a:prstGeom>
+          <a:noFill/>
+        </p:spPr>
+        <p:txBody>
+          <a:bodyPr wrap="square" anchor="ctr" lIns="0" rIns="0" tIns="0" bIns="0">
+            <a:spAutoFit/>
+          </a:bodyPr>
+          <a:lstStyle/>
+          <a:p>
+            <a:pPr algn="l">
+              <a:spcAft>
+                <a:spcPts val="400"/>
+              </a:spcAft>
+            </a:pPr>
+            <a:r>
+              <a:rPr sz="1000" b="0">
+                <a:solidFill>
+                  <a:srgbClr val="1A1A1A"/>
+                </a:solidFill>
+                <a:latin typeface="+mn-lt"/>
+              </a:rPr>
+              <a:t>Лидер в производстве и монтаже модульных навесных фасадов: производство 22 000 м², фасады высотой до 200 м, более 170 000 м² заказов в год.</a:t>
+            </a:r>
+          </a:p>
+        </p:txBody>
+      </p:sp>
+      <p:sp>
+        <p:nvSpPr>
+          <p:cNvPr id="546" name="Snip Single Corner Rectangle 545"/>
+          <p:cNvSpPr/>
+          <p:nvPr/>
+        </p:nvSpPr>
+        <p:spPr>
+          <a:xfrm>
+            <a:off x="594360" y="2624328"/>
+            <a:ext cx="1783080" cy="603504"/>
           </a:xfrm>
           <a:prstGeom prst="snip1Rect">
             <a:avLst/>
@@ -32532,37 +33142,36 @@
           <a:p>
             <a:pPr algn="l"/>
             <a:r>
-              <a:rPr sz="1200" b="1">
+              <a:rPr sz="1150" b="1">
                 <a:solidFill>
                   <a:srgbClr val="1A1A1A"/>
                 </a:solidFill>
                 <a:latin typeface="+mj-lt"/>
               </a:rPr>
-              <a:t>Контекст</a:t>
-            </a:r>
-          </a:p>
-        </p:txBody>
-      </p:sp>
-      <p:sp>
-        <p:nvSpPr>
-          <p:cNvPr id="545" name="Snip Single Corner Rectangle 544"/>
+              <a:t>Задача</a:t>
+            </a:r>
+          </a:p>
+        </p:txBody>
+      </p:sp>
+      <p:sp>
+        <p:nvSpPr>
+          <p:cNvPr id="547" name="Snip Single Corner Rectangle 546"/>
           <p:cNvSpPr/>
           <p:nvPr/>
         </p:nvSpPr>
         <p:spPr>
           <a:xfrm>
-            <a:off x="2606040" y="2011680"/>
-            <a:ext cx="5029200" cy="566928"/>
+            <a:off x="2450592" y="2624328"/>
+            <a:ext cx="5230368" cy="603504"/>
           </a:xfrm>
           <a:prstGeom prst="snip1Rect">
             <a:avLst/>
           </a:prstGeom>
           <a:noFill/>
-          <a:ln w="15875">
+          <a:ln w="12700">
             <a:solidFill>
               <a:srgbClr val="C9D3E0"/>
             </a:solidFill>
-            <a:prstDash val="dash"/>
           </a:ln>
           <a:effectLst/>
         </p:spPr>
@@ -32581,32 +33190,60 @@
           </a:fontRef>
         </p:style>
         <p:txBody>
-          <a:bodyPr rtlCol="0" anchor="ctr" lIns="73152" rIns="73152" tIns="0" bIns="0" wrap="square"/>
+          <a:bodyPr rtlCol="0" anchor="ctr"/>
           <a:lstStyle/>
-          <a:p>
-            <a:pPr algn="l"/>
-            <a:r>
-              <a:rPr sz="1050" b="0">
-                <a:solidFill>
-                  <a:srgbClr val="6B7280"/>
+          <a:p/>
+        </p:txBody>
+      </p:sp>
+      <p:sp>
+        <p:nvSpPr>
+          <p:cNvPr id="548" name="TextBox 547"/>
+          <p:cNvSpPr txBox="1"/>
+          <p:nvPr/>
+        </p:nvSpPr>
+        <p:spPr>
+          <a:xfrm>
+            <a:off x="2560320" y="2624328"/>
+            <a:ext cx="5029200" cy="603504"/>
+          </a:xfrm>
+          <a:prstGeom prst="rect">
+            <a:avLst/>
+          </a:prstGeom>
+          <a:noFill/>
+        </p:spPr>
+        <p:txBody>
+          <a:bodyPr wrap="square" anchor="ctr" lIns="0" rIns="0" tIns="0" bIns="0">
+            <a:spAutoFit/>
+          </a:bodyPr>
+          <a:lstStyle/>
+          <a:p>
+            <a:pPr algn="l">
+              <a:spcAft>
+                <a:spcPts val="400"/>
+              </a:spcAft>
+            </a:pPr>
+            <a:r>
+              <a:rPr sz="1000" b="0">
+                <a:solidFill>
+                  <a:srgbClr val="1A1A1A"/>
                 </a:solidFill>
                 <a:latin typeface="+mn-lt"/>
               </a:rPr>
-              <a:t>Объект, подразделения и исходный технологический процесс</a:t>
-            </a:r>
-          </a:p>
-        </p:txBody>
-      </p:sp>
-      <p:sp>
-        <p:nvSpPr>
-          <p:cNvPr id="546" name="Snip Single Corner Rectangle 545"/>
+              <a:t>Обрабатывать данные лазерного сканирования и анализировать облака точек, не уходя из привычной CAD-среды; контролировать монтаж и выявлять отклонения.</a:t>
+            </a:r>
+          </a:p>
+        </p:txBody>
+      </p:sp>
+      <p:sp>
+        <p:nvSpPr>
+          <p:cNvPr id="549" name="Snip Single Corner Rectangle 548"/>
           <p:cNvSpPr/>
           <p:nvPr/>
         </p:nvSpPr>
         <p:spPr>
           <a:xfrm>
-            <a:off x="594360" y="2670048"/>
-            <a:ext cx="1920240" cy="566928"/>
+            <a:off x="594360" y="3282696"/>
+            <a:ext cx="1783080" cy="603504"/>
           </a:xfrm>
           <a:prstGeom prst="snip1Rect">
             <a:avLst/>
@@ -32639,37 +33276,36 @@
           <a:p>
             <a:pPr algn="l"/>
             <a:r>
-              <a:rPr sz="1200" b="1">
+              <a:rPr sz="1150" b="1">
                 <a:solidFill>
                   <a:srgbClr val="1A1A1A"/>
                 </a:solidFill>
                 <a:latin typeface="+mj-lt"/>
               </a:rPr>
-              <a:t>Задача</a:t>
-            </a:r>
-          </a:p>
-        </p:txBody>
-      </p:sp>
-      <p:sp>
-        <p:nvSpPr>
-          <p:cNvPr id="547" name="Snip Single Corner Rectangle 546"/>
+              <a:t>ИТ-ландшафт</a:t>
+            </a:r>
+          </a:p>
+        </p:txBody>
+      </p:sp>
+      <p:sp>
+        <p:nvSpPr>
+          <p:cNvPr id="550" name="Snip Single Corner Rectangle 549"/>
           <p:cNvSpPr/>
           <p:nvPr/>
         </p:nvSpPr>
         <p:spPr>
           <a:xfrm>
-            <a:off x="2606040" y="2670048"/>
-            <a:ext cx="5029200" cy="566928"/>
+            <a:off x="2450592" y="3282696"/>
+            <a:ext cx="5230368" cy="603504"/>
           </a:xfrm>
           <a:prstGeom prst="snip1Rect">
             <a:avLst/>
           </a:prstGeom>
           <a:noFill/>
-          <a:ln w="15875">
+          <a:ln w="12700">
             <a:solidFill>
               <a:srgbClr val="C9D3E0"/>
             </a:solidFill>
-            <a:prstDash val="dash"/>
           </a:ln>
           <a:effectLst/>
         </p:spPr>
@@ -32688,32 +33324,60 @@
           </a:fontRef>
         </p:style>
         <p:txBody>
-          <a:bodyPr rtlCol="0" anchor="ctr" lIns="73152" rIns="73152" tIns="0" bIns="0" wrap="square"/>
+          <a:bodyPr rtlCol="0" anchor="ctr"/>
           <a:lstStyle/>
-          <a:p>
-            <a:pPr algn="l"/>
-            <a:r>
-              <a:rPr sz="1050" b="0">
-                <a:solidFill>
-                  <a:srgbClr val="6B7280"/>
+          <a:p/>
+        </p:txBody>
+      </p:sp>
+      <p:sp>
+        <p:nvSpPr>
+          <p:cNvPr id="551" name="TextBox 550"/>
+          <p:cNvSpPr txBox="1"/>
+          <p:nvPr/>
+        </p:nvSpPr>
+        <p:spPr>
+          <a:xfrm>
+            <a:off x="2560320" y="3282696"/>
+            <a:ext cx="5029200" cy="603504"/>
+          </a:xfrm>
+          <a:prstGeom prst="rect">
+            <a:avLst/>
+          </a:prstGeom>
+          <a:noFill/>
+        </p:spPr>
+        <p:txBody>
+          <a:bodyPr wrap="square" anchor="ctr" lIns="0" rIns="0" tIns="0" bIns="0">
+            <a:spAutoFit/>
+          </a:bodyPr>
+          <a:lstStyle/>
+          <a:p>
+            <a:pPr algn="l">
+              <a:spcAft>
+                <a:spcPts val="400"/>
+              </a:spcAft>
+            </a:pPr>
+            <a:r>
+              <a:rPr sz="1000" b="0">
+                <a:solidFill>
+                  <a:srgbClr val="1A1A1A"/>
                 </a:solidFill>
                 <a:latin typeface="+mn-lt"/>
               </a:rPr>
-              <a:t>Что требовалось изменить или проверить</a:t>
-            </a:r>
-          </a:p>
-        </p:txBody>
-      </p:sp>
-      <p:sp>
-        <p:nvSpPr>
-          <p:cNvPr id="548" name="Snip Single Corner Rectangle 547"/>
+              <a:t>Проекты в DWG из AutoCAD. Решение — Платформа nanoCAD, «Облака точек», конфигурация «Метрология»: полная совместимость с DWG.</a:t>
+            </a:r>
+          </a:p>
+        </p:txBody>
+      </p:sp>
+      <p:sp>
+        <p:nvSpPr>
+          <p:cNvPr id="552" name="Snip Single Corner Rectangle 551"/>
           <p:cNvSpPr/>
           <p:nvPr/>
         </p:nvSpPr>
         <p:spPr>
           <a:xfrm>
-            <a:off x="594360" y="3328415"/>
-            <a:ext cx="1920240" cy="566928"/>
+            <a:off x="594360" y="3941063"/>
+            <a:ext cx="1783080" cy="603504"/>
           </a:xfrm>
           <a:prstGeom prst="snip1Rect">
             <a:avLst/>
@@ -32746,37 +33410,36 @@
           <a:p>
             <a:pPr algn="l"/>
             <a:r>
-              <a:rPr sz="1200" b="1">
+              <a:rPr sz="1150" b="1">
                 <a:solidFill>
                   <a:srgbClr val="1A1A1A"/>
                 </a:solidFill>
                 <a:latin typeface="+mj-lt"/>
               </a:rPr>
-              <a:t>ИТ-ландшафт</a:t>
-            </a:r>
-          </a:p>
-        </p:txBody>
-      </p:sp>
-      <p:sp>
-        <p:nvSpPr>
-          <p:cNvPr id="549" name="Snip Single Corner Rectangle 548"/>
+              <a:t>Роль Нормасофт</a:t>
+            </a:r>
+          </a:p>
+        </p:txBody>
+      </p:sp>
+      <p:sp>
+        <p:nvSpPr>
+          <p:cNvPr id="553" name="Snip Single Corner Rectangle 552"/>
           <p:cNvSpPr/>
           <p:nvPr/>
         </p:nvSpPr>
         <p:spPr>
           <a:xfrm>
-            <a:off x="2606040" y="3328415"/>
-            <a:ext cx="5029200" cy="566928"/>
+            <a:off x="2450592" y="3941063"/>
+            <a:ext cx="5230368" cy="603504"/>
           </a:xfrm>
           <a:prstGeom prst="snip1Rect">
             <a:avLst/>
           </a:prstGeom>
           <a:noFill/>
-          <a:ln w="15875">
+          <a:ln w="12700">
             <a:solidFill>
               <a:srgbClr val="C9D3E0"/>
             </a:solidFill>
-            <a:prstDash val="dash"/>
           </a:ln>
           <a:effectLst/>
         </p:spPr>
@@ -32795,32 +33458,194 @@
           </a:fontRef>
         </p:style>
         <p:txBody>
+          <a:bodyPr rtlCol="0" anchor="ctr"/>
+          <a:lstStyle/>
+          <a:p/>
+        </p:txBody>
+      </p:sp>
+      <p:sp>
+        <p:nvSpPr>
+          <p:cNvPr id="554" name="TextBox 553"/>
+          <p:cNvSpPr txBox="1"/>
+          <p:nvPr/>
+        </p:nvSpPr>
+        <p:spPr>
+          <a:xfrm>
+            <a:off x="2560320" y="3941063"/>
+            <a:ext cx="5029200" cy="603504"/>
+          </a:xfrm>
+          <a:prstGeom prst="rect">
+            <a:avLst/>
+          </a:prstGeom>
+          <a:noFill/>
+        </p:spPr>
+        <p:txBody>
+          <a:bodyPr wrap="square" anchor="ctr" lIns="0" rIns="0" tIns="0" bIns="0">
+            <a:spAutoFit/>
+          </a:bodyPr>
+          <a:lstStyle/>
+          <a:p>
+            <a:pPr algn="l">
+              <a:spcAft>
+                <a:spcPts val="400"/>
+              </a:spcAft>
+            </a:pPr>
+            <a:r>
+              <a:rPr sz="1000" b="0">
+                <a:solidFill>
+                  <a:srgbClr val="1A1A1A"/>
+                </a:solidFill>
+                <a:latin typeface="+mn-lt"/>
+              </a:rPr>
+              <a:t>Пилот на реальном объекте с 01.02.2025 в формате фокус-группы: технический директор, руководители проектного департамента и КБ, проектировщики, геодезисты.</a:t>
+            </a:r>
+          </a:p>
+        </p:txBody>
+      </p:sp>
+      <p:sp>
+        <p:nvSpPr>
+          <p:cNvPr id="555" name="Snip Single Corner Rectangle 554"/>
+          <p:cNvSpPr/>
+          <p:nvPr/>
+        </p:nvSpPr>
+        <p:spPr>
+          <a:xfrm>
+            <a:off x="594360" y="4599431"/>
+            <a:ext cx="1783080" cy="603504"/>
+          </a:xfrm>
+          <a:prstGeom prst="snip1Rect">
+            <a:avLst/>
+          </a:prstGeom>
+          <a:solidFill>
+            <a:srgbClr val="0386FC"/>
+          </a:solidFill>
+          <a:ln>
+            <a:noFill/>
+          </a:ln>
+          <a:effectLst/>
+        </p:spPr>
+        <p:style>
+          <a:lnRef idx="1">
+            <a:schemeClr val="accent1"/>
+          </a:lnRef>
+          <a:fillRef idx="3">
+            <a:schemeClr val="accent1"/>
+          </a:fillRef>
+          <a:effectRef idx="2">
+            <a:schemeClr val="accent1"/>
+          </a:effectRef>
+          <a:fontRef idx="minor">
+            <a:schemeClr val="lt1"/>
+          </a:fontRef>
+        </p:style>
+        <p:txBody>
           <a:bodyPr rtlCol="0" anchor="ctr" lIns="73152" rIns="73152" tIns="0" bIns="0" wrap="square"/>
           <a:lstStyle/>
           <a:p>
             <a:pPr algn="l"/>
             <a:r>
-              <a:rPr sz="1050" b="0">
-                <a:solidFill>
-                  <a:srgbClr val="6B7280"/>
+              <a:rPr sz="1150" b="1">
+                <a:solidFill>
+                  <a:srgbClr val="FFFFFF"/>
+                </a:solidFill>
+                <a:latin typeface="+mj-lt"/>
+              </a:rPr>
+              <a:t>Результат</a:t>
+            </a:r>
+          </a:p>
+        </p:txBody>
+      </p:sp>
+      <p:sp>
+        <p:nvSpPr>
+          <p:cNvPr id="556" name="Snip Single Corner Rectangle 555"/>
+          <p:cNvSpPr/>
+          <p:nvPr/>
+        </p:nvSpPr>
+        <p:spPr>
+          <a:xfrm>
+            <a:off x="2450592" y="4599431"/>
+            <a:ext cx="5230368" cy="603504"/>
+          </a:xfrm>
+          <a:prstGeom prst="snip1Rect">
+            <a:avLst/>
+          </a:prstGeom>
+          <a:solidFill>
+            <a:srgbClr val="E3EFFE"/>
+          </a:solidFill>
+          <a:ln>
+            <a:noFill/>
+          </a:ln>
+          <a:effectLst/>
+        </p:spPr>
+        <p:style>
+          <a:lnRef idx="1">
+            <a:schemeClr val="accent1"/>
+          </a:lnRef>
+          <a:fillRef idx="3">
+            <a:schemeClr val="accent1"/>
+          </a:fillRef>
+          <a:effectRef idx="2">
+            <a:schemeClr val="accent1"/>
+          </a:effectRef>
+          <a:fontRef idx="minor">
+            <a:schemeClr val="lt1"/>
+          </a:fontRef>
+        </p:style>
+        <p:txBody>
+          <a:bodyPr rtlCol="0" anchor="ctr"/>
+          <a:lstStyle/>
+          <a:p/>
+        </p:txBody>
+      </p:sp>
+      <p:sp>
+        <p:nvSpPr>
+          <p:cNvPr id="557" name="TextBox 556"/>
+          <p:cNvSpPr txBox="1"/>
+          <p:nvPr/>
+        </p:nvSpPr>
+        <p:spPr>
+          <a:xfrm>
+            <a:off x="2560320" y="4599431"/>
+            <a:ext cx="5029200" cy="603504"/>
+          </a:xfrm>
+          <a:prstGeom prst="rect">
+            <a:avLst/>
+          </a:prstGeom>
+          <a:noFill/>
+        </p:spPr>
+        <p:txBody>
+          <a:bodyPr wrap="square" anchor="ctr" lIns="0" rIns="0" tIns="0" bIns="0">
+            <a:spAutoFit/>
+          </a:bodyPr>
+          <a:lstStyle/>
+          <a:p>
+            <a:pPr algn="l">
+              <a:spcAft>
+                <a:spcPts val="400"/>
+              </a:spcAft>
+            </a:pPr>
+            <a:r>
+              <a:rPr sz="1000" b="0">
+                <a:solidFill>
+                  <a:srgbClr val="1A1A1A"/>
                 </a:solidFill>
                 <a:latin typeface="+mn-lt"/>
               </a:rPr>
-              <a:t>Какие продукты и форматы уже использовались, что нужно было сохранить</a:t>
-            </a:r>
-          </a:p>
-        </p:txBody>
-      </p:sp>
-      <p:sp>
-        <p:nvSpPr>
-          <p:cNvPr id="550" name="Snip Single Corner Rectangle 549"/>
+              <a:t>«Событие-4»: контроль монтажа мостовых конструкций на высоте 170 м, точность до 3 мм, время контроля −30%. Заказчик планирует полную версию и другие решения nanoCAD.</a:t>
+            </a:r>
+          </a:p>
+        </p:txBody>
+      </p:sp>
+      <p:sp>
+        <p:nvSpPr>
+          <p:cNvPr id="558" name="Snip Single Corner Rectangle 557"/>
           <p:cNvSpPr/>
           <p:nvPr/>
         </p:nvSpPr>
         <p:spPr>
           <a:xfrm>
-            <a:off x="594360" y="3986783"/>
-            <a:ext cx="1920240" cy="566928"/>
+            <a:off x="594360" y="5257799"/>
+            <a:ext cx="1783080" cy="603504"/>
           </a:xfrm>
           <a:prstGeom prst="snip1Rect">
             <a:avLst/>
@@ -32853,37 +33678,36 @@
           <a:p>
             <a:pPr algn="l"/>
             <a:r>
-              <a:rPr sz="1200" b="1">
+              <a:rPr sz="1150" b="1">
                 <a:solidFill>
                   <a:srgbClr val="1A1A1A"/>
                 </a:solidFill>
                 <a:latin typeface="+mj-lt"/>
               </a:rPr>
-              <a:t>Работа Нормасофт</a:t>
-            </a:r>
-          </a:p>
-        </p:txBody>
-      </p:sp>
-      <p:sp>
-        <p:nvSpPr>
-          <p:cNvPr id="551" name="Snip Single Corner Rectangle 550"/>
+              <a:t>Применимость</a:t>
+            </a:r>
+          </a:p>
+        </p:txBody>
+      </p:sp>
+      <p:sp>
+        <p:nvSpPr>
+          <p:cNvPr id="559" name="Snip Single Corner Rectangle 558"/>
           <p:cNvSpPr/>
           <p:nvPr/>
         </p:nvSpPr>
         <p:spPr>
           <a:xfrm>
-            <a:off x="2606040" y="3986783"/>
-            <a:ext cx="5029200" cy="566928"/>
+            <a:off x="2450592" y="5257799"/>
+            <a:ext cx="5230368" cy="603504"/>
           </a:xfrm>
           <a:prstGeom prst="snip1Rect">
             <a:avLst/>
           </a:prstGeom>
           <a:noFill/>
-          <a:ln w="15875">
+          <a:ln w="12700">
             <a:solidFill>
               <a:srgbClr val="C9D3E0"/>
             </a:solidFill>
-            <a:prstDash val="dash"/>
           </a:ln>
           <a:effectLst/>
         </p:spPr>
@@ -32902,39 +33726,130 @@
           </a:fontRef>
         </p:style>
         <p:txBody>
-          <a:bodyPr rtlCol="0" anchor="ctr" lIns="73152" rIns="73152" tIns="0" bIns="0" wrap="square"/>
+          <a:bodyPr rtlCol="0" anchor="ctr"/>
           <a:lstStyle/>
-          <a:p>
-            <a:pPr algn="l"/>
-            <a:r>
-              <a:rPr sz="1050" b="0">
+          <a:p/>
+        </p:txBody>
+      </p:sp>
+      <p:sp>
+        <p:nvSpPr>
+          <p:cNvPr id="560" name="TextBox 559"/>
+          <p:cNvSpPr txBox="1"/>
+          <p:nvPr/>
+        </p:nvSpPr>
+        <p:spPr>
+          <a:xfrm>
+            <a:off x="2560320" y="5257799"/>
+            <a:ext cx="5029200" cy="603504"/>
+          </a:xfrm>
+          <a:prstGeom prst="rect">
+            <a:avLst/>
+          </a:prstGeom>
+          <a:noFill/>
+        </p:spPr>
+        <p:txBody>
+          <a:bodyPr wrap="square" anchor="ctr" lIns="0" rIns="0" tIns="0" bIns="0">
+            <a:spAutoFit/>
+          </a:bodyPr>
+          <a:lstStyle/>
+          <a:p>
+            <a:pPr algn="l">
+              <a:spcAft>
+                <a:spcPts val="400"/>
+              </a:spcAft>
+            </a:pPr>
+            <a:r>
+              <a:rPr sz="1000" b="0">
+                <a:solidFill>
+                  <a:srgbClr val="1A1A1A"/>
+                </a:solidFill>
+                <a:latin typeface="+mn-lt"/>
+              </a:rPr>
+              <a:t>Фокус-группа из руководителей и исполнителей и пилот на реальном объекте — тот же подход, что в интервью и пилоте после аудита.</a:t>
+            </a:r>
+          </a:p>
+        </p:txBody>
+      </p:sp>
+      <p:pic>
+        <p:nvPicPr>
+          <p:cNvPr id="561" name="Picture 560" descr="genezis_sobytie4.png"/>
+          <p:cNvPicPr>
+            <a:picLocks noChangeAspect="1"/>
+          </p:cNvPicPr>
+          <p:nvPr/>
+        </p:nvPicPr>
+        <p:blipFill>
+          <a:blip r:embed="rId11"/>
+          <a:stretch>
+            <a:fillRect/>
+          </a:stretch>
+        </p:blipFill>
+        <p:spPr>
+          <a:xfrm>
+            <a:off x="8424614" y="1965960"/>
+            <a:ext cx="2490331" cy="3520440"/>
+          </a:xfrm>
+          <a:prstGeom prst="rect">
+            <a:avLst/>
+          </a:prstGeom>
+        </p:spPr>
+      </p:pic>
+      <p:sp>
+        <p:nvSpPr>
+          <p:cNvPr id="562" name="TextBox 561"/>
+          <p:cNvSpPr txBox="1"/>
+          <p:nvPr/>
+        </p:nvSpPr>
+        <p:spPr>
+          <a:xfrm>
+            <a:off x="7863840" y="5577840"/>
+            <a:ext cx="3611880" cy="274320"/>
+          </a:xfrm>
+          <a:prstGeom prst="rect">
+            <a:avLst/>
+          </a:prstGeom>
+          <a:noFill/>
+        </p:spPr>
+        <p:txBody>
+          <a:bodyPr wrap="square" anchor="t" lIns="0" rIns="0" tIns="0" bIns="0">
+            <a:spAutoFit/>
+          </a:bodyPr>
+          <a:lstStyle/>
+          <a:p>
+            <a:pPr algn="ctr">
+              <a:spcAft>
+                <a:spcPts val="400"/>
+              </a:spcAft>
+            </a:pPr>
+            <a:r>
+              <a:rPr sz="900" b="0">
                 <a:solidFill>
                   <a:srgbClr val="6B7280"/>
                 </a:solidFill>
                 <a:latin typeface="+mn-lt"/>
               </a:rPr>
-              <a:t>Обследование, настройка, интеграция, обучение, пилот, передача требований разработчикам</a:t>
-            </a:r>
-          </a:p>
-        </p:txBody>
-      </p:sp>
-      <p:sp>
-        <p:nvSpPr>
-          <p:cNvPr id="552" name="Snip Single Corner Rectangle 551"/>
+              <a:t>Объект «Событие-4»</a:t>
+            </a:r>
+          </a:p>
+        </p:txBody>
+      </p:sp>
+      <p:sp>
+        <p:nvSpPr>
+          <p:cNvPr id="563" name="nav">
+            <a:hlinkClick action="ppaction://hlinksldjump" r:id="rId5"/>
+          </p:cNvPr>
           <p:cNvSpPr/>
           <p:nvPr/>
         </p:nvSpPr>
         <p:spPr>
           <a:xfrm>
-            <a:off x="594360" y="4645151"/>
-            <a:ext cx="1920240" cy="566928"/>
+            <a:off x="932688" y="429768"/>
+            <a:ext cx="1385316" cy="338328"/>
           </a:xfrm>
           <a:prstGeom prst="snip1Rect">
             <a:avLst/>
           </a:prstGeom>
-          <a:solidFill>
-            <a:srgbClr val="0386FC"/>
-          </a:solidFill>
+          <a:noFill/>
           <a:ln>
             <a:noFill/>
           </a:ln>
@@ -32958,39 +33873,38 @@
           <a:bodyPr rtlCol="0" anchor="ctr" lIns="73152" rIns="73152" tIns="0" bIns="0" wrap="square"/>
           <a:lstStyle/>
           <a:p>
-            <a:pPr algn="l"/>
-            <a:r>
-              <a:rPr sz="1200" b="1">
+            <a:pPr algn="ctr"/>
+            <a:r>
+              <a:rPr sz="1100" b="0">
                 <a:solidFill>
                   <a:srgbClr val="FFFFFF"/>
                 </a:solidFill>
-                <a:latin typeface="+mj-lt"/>
-              </a:rPr>
-              <a:t>Результат</a:t>
-            </a:r>
-          </a:p>
-        </p:txBody>
-      </p:sp>
-      <p:sp>
-        <p:nvSpPr>
-          <p:cNvPr id="553" name="Snip Single Corner Rectangle 552"/>
+                <a:latin typeface="Manrope"/>
+              </a:rPr>
+              <a:t>ЗАЧЕМ АУДИТ</a:t>
+            </a:r>
+          </a:p>
+        </p:txBody>
+      </p:sp>
+      <p:sp>
+        <p:nvSpPr>
+          <p:cNvPr id="564" name="nav">
+            <a:hlinkClick action="ppaction://hlinksldjump" r:id="rId4"/>
+          </p:cNvPr>
           <p:cNvSpPr/>
           <p:nvPr/>
         </p:nvSpPr>
         <p:spPr>
           <a:xfrm>
-            <a:off x="2606040" y="4645151"/>
-            <a:ext cx="5029200" cy="566928"/>
+            <a:off x="2409444" y="429768"/>
+            <a:ext cx="809244" cy="338328"/>
           </a:xfrm>
           <a:prstGeom prst="snip1Rect">
             <a:avLst/>
           </a:prstGeom>
           <a:noFill/>
-          <a:ln w="15875">
-            <a:solidFill>
-              <a:srgbClr val="C9D3E0"/>
-            </a:solidFill>
-            <a:prstDash val="dash"/>
+          <a:ln>
+            <a:noFill/>
           </a:ln>
           <a:effectLst/>
         </p:spPr>
@@ -33012,36 +33926,36 @@
           <a:bodyPr rtlCol="0" anchor="ctr" lIns="73152" rIns="73152" tIns="0" bIns="0" wrap="square"/>
           <a:lstStyle/>
           <a:p>
-            <a:pPr algn="l"/>
-            <a:r>
-              <a:rPr sz="1050" b="0">
-                <a:solidFill>
-                  <a:srgbClr val="6B7280"/>
-                </a:solidFill>
-                <a:latin typeface="+mn-lt"/>
-              </a:rPr>
-              <a:t>Что заказчик смог сделать сам; какие документы или модели получил; что осталось в бэклоге</a:t>
-            </a:r>
-          </a:p>
-        </p:txBody>
-      </p:sp>
-      <p:sp>
-        <p:nvSpPr>
-          <p:cNvPr id="554" name="Snip Single Corner Rectangle 553"/>
+            <a:pPr algn="ctr"/>
+            <a:r>
+              <a:rPr sz="1100" b="0">
+                <a:solidFill>
+                  <a:srgbClr val="FFFFFF"/>
+                </a:solidFill>
+                <a:latin typeface="Manrope"/>
+              </a:rPr>
+              <a:t>ЭТАПЫ</a:t>
+            </a:r>
+          </a:p>
+        </p:txBody>
+      </p:sp>
+      <p:sp>
+        <p:nvSpPr>
+          <p:cNvPr id="565" name="nav">
+            <a:hlinkClick action="ppaction://hlinksldjump" r:id="rId16"/>
+          </p:cNvPr>
           <p:cNvSpPr/>
           <p:nvPr/>
         </p:nvSpPr>
         <p:spPr>
           <a:xfrm>
-            <a:off x="594360" y="5303519"/>
-            <a:ext cx="1920240" cy="566928"/>
+            <a:off x="3310128" y="429768"/>
+            <a:ext cx="1193292" cy="338328"/>
           </a:xfrm>
           <a:prstGeom prst="snip1Rect">
             <a:avLst/>
           </a:prstGeom>
-          <a:solidFill>
-            <a:srgbClr val="F1F3F6"/>
-          </a:solidFill>
+          <a:noFill/>
           <a:ln>
             <a:noFill/>
           </a:ln>
@@ -33065,39 +33979,40 @@
           <a:bodyPr rtlCol="0" anchor="ctr" lIns="73152" rIns="73152" tIns="0" bIns="0" wrap="square"/>
           <a:lstStyle/>
           <a:p>
-            <a:pPr algn="l"/>
-            <a:r>
-              <a:rPr sz="1200" b="1">
-                <a:solidFill>
-                  <a:srgbClr val="1A1A1A"/>
-                </a:solidFill>
-                <a:latin typeface="+mj-lt"/>
-              </a:rPr>
-              <a:t>Применимость</a:t>
-            </a:r>
-          </a:p>
-        </p:txBody>
-      </p:sp>
-      <p:sp>
-        <p:nvSpPr>
-          <p:cNvPr id="555" name="Snip Single Corner Rectangle 554"/>
+            <a:pPr algn="ctr"/>
+            <a:r>
+              <a:rPr sz="1100" b="0">
+                <a:solidFill>
+                  <a:srgbClr val="FFFFFF"/>
+                </a:solidFill>
+                <a:latin typeface="Manrope"/>
+              </a:rPr>
+              <a:t>РЕЗУЛЬТАТ</a:t>
+            </a:r>
+          </a:p>
+        </p:txBody>
+      </p:sp>
+      <p:sp>
+        <p:nvSpPr>
+          <p:cNvPr id="566" name="nav">
+            <a:hlinkClick action="ppaction://hlinksldjump" r:id="rId17"/>
+          </p:cNvPr>
           <p:cNvSpPr/>
           <p:nvPr/>
         </p:nvSpPr>
         <p:spPr>
           <a:xfrm>
-            <a:off x="2606040" y="5303519"/>
-            <a:ext cx="5029200" cy="566928"/>
+            <a:off x="4594860" y="429768"/>
+            <a:ext cx="809244" cy="338328"/>
           </a:xfrm>
           <a:prstGeom prst="snip1Rect">
             <a:avLst/>
           </a:prstGeom>
-          <a:noFill/>
-          <a:ln w="15875">
-            <a:solidFill>
-              <a:srgbClr val="C9D3E0"/>
-            </a:solidFill>
-            <a:prstDash val="dash"/>
+          <a:solidFill>
+            <a:srgbClr val="FFFFFF"/>
+          </a:solidFill>
+          <a:ln>
+            <a:noFill/>
           </a:ln>
           <a:effectLst/>
         </p:spPr>
@@ -33119,41 +34034,38 @@
           <a:bodyPr rtlCol="0" anchor="ctr" lIns="73152" rIns="73152" tIns="0" bIns="0" wrap="square"/>
           <a:lstStyle/>
           <a:p>
-            <a:pPr algn="l"/>
-            <a:r>
-              <a:rPr sz="1050" b="0">
-                <a:solidFill>
-                  <a:srgbClr val="6B7280"/>
-                </a:solidFill>
-                <a:latin typeface="+mn-lt"/>
-              </a:rPr>
-              <a:t>Что из кейса можно применить в вашей организации</a:t>
-            </a:r>
-          </a:p>
-        </p:txBody>
-      </p:sp>
-      <p:sp>
-        <p:nvSpPr>
-          <p:cNvPr id="556" name="Snip Single Corner Rectangle 555"/>
+            <a:pPr algn="ctr"/>
+            <a:r>
+              <a:rPr sz="1100" b="0">
+                <a:solidFill>
+                  <a:srgbClr val="0386FC"/>
+                </a:solidFill>
+                <a:latin typeface="Manrope"/>
+              </a:rPr>
+              <a:t>КЕЙСЫ</a:t>
+            </a:r>
+          </a:p>
+        </p:txBody>
+      </p:sp>
+      <p:sp>
+        <p:nvSpPr>
+          <p:cNvPr id="567" name="nav">
+            <a:hlinkClick action="ppaction://hlinksldjump" r:id="rId3"/>
+          </p:cNvPr>
           <p:cNvSpPr/>
           <p:nvPr/>
         </p:nvSpPr>
         <p:spPr>
           <a:xfrm>
-            <a:off x="7863840" y="2011680"/>
-            <a:ext cx="3611880" cy="3877056"/>
+            <a:off x="5495544" y="429768"/>
+            <a:ext cx="1193292" cy="338328"/>
           </a:xfrm>
           <a:prstGeom prst="snip1Rect">
             <a:avLst/>
           </a:prstGeom>
-          <a:solidFill>
-            <a:srgbClr val="F1F3F6"/>
-          </a:solidFill>
-          <a:ln w="15875">
-            <a:solidFill>
-              <a:srgbClr val="C9D3E0"/>
-            </a:solidFill>
-            <a:prstDash val="dash"/>
+          <a:noFill/>
+          <a:ln>
+            <a:noFill/>
           </a:ln>
           <a:effectLst/>
         </p:spPr>
@@ -33177,29 +34089,29 @@
           <a:p>
             <a:pPr algn="ctr"/>
             <a:r>
-              <a:rPr sz="1200" b="0">
-                <a:solidFill>
-                  <a:srgbClr val="6B7280"/>
-                </a:solidFill>
-                <a:latin typeface="+mn-lt"/>
-              </a:rPr>
-              <a:t>Изображение объекта или фрагмент карты ИТ-ландшафта</a:t>
-            </a:r>
-          </a:p>
-        </p:txBody>
-      </p:sp>
-      <p:sp>
-        <p:nvSpPr>
-          <p:cNvPr id="557" name="nav">
-            <a:hlinkClick action="ppaction://hlinksldjump" r:id="rId13"/>
+              <a:rPr sz="1100" b="0">
+                <a:solidFill>
+                  <a:srgbClr val="FFFFFF"/>
+                </a:solidFill>
+                <a:latin typeface="Manrope"/>
+              </a:rPr>
+              <a:t>ВНЕДРЕНИЕ</a:t>
+            </a:r>
+          </a:p>
+        </p:txBody>
+      </p:sp>
+      <p:sp>
+        <p:nvSpPr>
+          <p:cNvPr id="568" name="nav">
+            <a:hlinkClick action="ppaction://hlinksldjump" r:id="rId2"/>
           </p:cNvPr>
           <p:cNvSpPr/>
           <p:nvPr/>
         </p:nvSpPr>
         <p:spPr>
           <a:xfrm>
-            <a:off x="932688" y="429768"/>
-            <a:ext cx="1385316" cy="338328"/>
+            <a:off x="6780276" y="429768"/>
+            <a:ext cx="1193292" cy="338328"/>
           </a:xfrm>
           <a:prstGeom prst="snip1Rect">
             <a:avLst/>
@@ -33236,23 +34148,23 @@
                 </a:solidFill>
                 <a:latin typeface="Manrope"/>
               </a:rPr>
-              <a:t>ЗАЧЕМ АУДИТ</a:t>
-            </a:r>
-          </a:p>
-        </p:txBody>
-      </p:sp>
-      <p:sp>
-        <p:nvSpPr>
-          <p:cNvPr id="558" name="nav">
-            <a:hlinkClick action="ppaction://hlinksldjump" r:id="rId5"/>
+              <a:t>НОРМАСОФТ</a:t>
+            </a:r>
+          </a:p>
+        </p:txBody>
+      </p:sp>
+      <p:sp>
+        <p:nvSpPr>
+          <p:cNvPr id="569" name="nav">
+            <a:hlinkClick action="ppaction://hlinksldjump" r:id="rId18"/>
           </p:cNvPr>
           <p:cNvSpPr/>
           <p:nvPr/>
         </p:nvSpPr>
         <p:spPr>
           <a:xfrm>
-            <a:off x="2409444" y="429768"/>
-            <a:ext cx="809244" cy="338328"/>
+            <a:off x="8065008" y="429768"/>
+            <a:ext cx="1289304" cy="338328"/>
           </a:xfrm>
           <a:prstGeom prst="snip1Rect">
             <a:avLst/>
@@ -33289,273 +34201,6 @@
                 </a:solidFill>
                 <a:latin typeface="Manrope"/>
               </a:rPr>
-              <a:t>ЭТАПЫ</a:t>
-            </a:r>
-          </a:p>
-        </p:txBody>
-      </p:sp>
-      <p:sp>
-        <p:nvSpPr>
-          <p:cNvPr id="559" name="nav">
-            <a:hlinkClick action="ppaction://hlinksldjump" r:id="rId4"/>
-          </p:cNvPr>
-          <p:cNvSpPr/>
-          <p:nvPr/>
-        </p:nvSpPr>
-        <p:spPr>
-          <a:xfrm>
-            <a:off x="3310128" y="429768"/>
-            <a:ext cx="1193292" cy="338328"/>
-          </a:xfrm>
-          <a:prstGeom prst="snip1Rect">
-            <a:avLst/>
-          </a:prstGeom>
-          <a:noFill/>
-          <a:ln>
-            <a:noFill/>
-          </a:ln>
-          <a:effectLst/>
-        </p:spPr>
-        <p:style>
-          <a:lnRef idx="1">
-            <a:schemeClr val="accent1"/>
-          </a:lnRef>
-          <a:fillRef idx="3">
-            <a:schemeClr val="accent1"/>
-          </a:fillRef>
-          <a:effectRef idx="2">
-            <a:schemeClr val="accent1"/>
-          </a:effectRef>
-          <a:fontRef idx="minor">
-            <a:schemeClr val="lt1"/>
-          </a:fontRef>
-        </p:style>
-        <p:txBody>
-          <a:bodyPr rtlCol="0" anchor="ctr" lIns="73152" rIns="73152" tIns="0" bIns="0" wrap="square"/>
-          <a:lstStyle/>
-          <a:p>
-            <a:pPr algn="ctr"/>
-            <a:r>
-              <a:rPr sz="1100" b="0">
-                <a:solidFill>
-                  <a:srgbClr val="FFFFFF"/>
-                </a:solidFill>
-                <a:latin typeface="Manrope"/>
-              </a:rPr>
-              <a:t>РЕЗУЛЬТАТ</a:t>
-            </a:r>
-          </a:p>
-        </p:txBody>
-      </p:sp>
-      <p:sp>
-        <p:nvSpPr>
-          <p:cNvPr id="560" name="nav">
-            <a:hlinkClick action="ppaction://hlinksldjump" r:id="rId16"/>
-          </p:cNvPr>
-          <p:cNvSpPr/>
-          <p:nvPr/>
-        </p:nvSpPr>
-        <p:spPr>
-          <a:xfrm>
-            <a:off x="4594860" y="429768"/>
-            <a:ext cx="809244" cy="338328"/>
-          </a:xfrm>
-          <a:prstGeom prst="snip1Rect">
-            <a:avLst/>
-          </a:prstGeom>
-          <a:solidFill>
-            <a:srgbClr val="FFFFFF"/>
-          </a:solidFill>
-          <a:ln>
-            <a:noFill/>
-          </a:ln>
-          <a:effectLst/>
-        </p:spPr>
-        <p:style>
-          <a:lnRef idx="1">
-            <a:schemeClr val="accent1"/>
-          </a:lnRef>
-          <a:fillRef idx="3">
-            <a:schemeClr val="accent1"/>
-          </a:fillRef>
-          <a:effectRef idx="2">
-            <a:schemeClr val="accent1"/>
-          </a:effectRef>
-          <a:fontRef idx="minor">
-            <a:schemeClr val="lt1"/>
-          </a:fontRef>
-        </p:style>
-        <p:txBody>
-          <a:bodyPr rtlCol="0" anchor="ctr" lIns="73152" rIns="73152" tIns="0" bIns="0" wrap="square"/>
-          <a:lstStyle/>
-          <a:p>
-            <a:pPr algn="ctr"/>
-            <a:r>
-              <a:rPr sz="1100" b="0">
-                <a:solidFill>
-                  <a:srgbClr val="0386FC"/>
-                </a:solidFill>
-                <a:latin typeface="Manrope"/>
-              </a:rPr>
-              <a:t>КЕЙСЫ</a:t>
-            </a:r>
-          </a:p>
-        </p:txBody>
-      </p:sp>
-      <p:sp>
-        <p:nvSpPr>
-          <p:cNvPr id="561" name="nav">
-            <a:hlinkClick action="ppaction://hlinksldjump" r:id="rId3"/>
-          </p:cNvPr>
-          <p:cNvSpPr/>
-          <p:nvPr/>
-        </p:nvSpPr>
-        <p:spPr>
-          <a:xfrm>
-            <a:off x="5495544" y="429768"/>
-            <a:ext cx="1193292" cy="338328"/>
-          </a:xfrm>
-          <a:prstGeom prst="snip1Rect">
-            <a:avLst/>
-          </a:prstGeom>
-          <a:noFill/>
-          <a:ln>
-            <a:noFill/>
-          </a:ln>
-          <a:effectLst/>
-        </p:spPr>
-        <p:style>
-          <a:lnRef idx="1">
-            <a:schemeClr val="accent1"/>
-          </a:lnRef>
-          <a:fillRef idx="3">
-            <a:schemeClr val="accent1"/>
-          </a:fillRef>
-          <a:effectRef idx="2">
-            <a:schemeClr val="accent1"/>
-          </a:effectRef>
-          <a:fontRef idx="minor">
-            <a:schemeClr val="lt1"/>
-          </a:fontRef>
-        </p:style>
-        <p:txBody>
-          <a:bodyPr rtlCol="0" anchor="ctr" lIns="73152" rIns="73152" tIns="0" bIns="0" wrap="square"/>
-          <a:lstStyle/>
-          <a:p>
-            <a:pPr algn="ctr"/>
-            <a:r>
-              <a:rPr sz="1100" b="0">
-                <a:solidFill>
-                  <a:srgbClr val="FFFFFF"/>
-                </a:solidFill>
-                <a:latin typeface="Manrope"/>
-              </a:rPr>
-              <a:t>ВНЕДРЕНИЕ</a:t>
-            </a:r>
-          </a:p>
-        </p:txBody>
-      </p:sp>
-      <p:sp>
-        <p:nvSpPr>
-          <p:cNvPr id="562" name="nav">
-            <a:hlinkClick action="ppaction://hlinksldjump" r:id="rId2"/>
-          </p:cNvPr>
-          <p:cNvSpPr/>
-          <p:nvPr/>
-        </p:nvSpPr>
-        <p:spPr>
-          <a:xfrm>
-            <a:off x="6780276" y="429768"/>
-            <a:ext cx="1193292" cy="338328"/>
-          </a:xfrm>
-          <a:prstGeom prst="snip1Rect">
-            <a:avLst/>
-          </a:prstGeom>
-          <a:noFill/>
-          <a:ln>
-            <a:noFill/>
-          </a:ln>
-          <a:effectLst/>
-        </p:spPr>
-        <p:style>
-          <a:lnRef idx="1">
-            <a:schemeClr val="accent1"/>
-          </a:lnRef>
-          <a:fillRef idx="3">
-            <a:schemeClr val="accent1"/>
-          </a:fillRef>
-          <a:effectRef idx="2">
-            <a:schemeClr val="accent1"/>
-          </a:effectRef>
-          <a:fontRef idx="minor">
-            <a:schemeClr val="lt1"/>
-          </a:fontRef>
-        </p:style>
-        <p:txBody>
-          <a:bodyPr rtlCol="0" anchor="ctr" lIns="73152" rIns="73152" tIns="0" bIns="0" wrap="square"/>
-          <a:lstStyle/>
-          <a:p>
-            <a:pPr algn="ctr"/>
-            <a:r>
-              <a:rPr sz="1100" b="0">
-                <a:solidFill>
-                  <a:srgbClr val="FFFFFF"/>
-                </a:solidFill>
-                <a:latin typeface="Manrope"/>
-              </a:rPr>
-              <a:t>НОРМАСОФТ</a:t>
-            </a:r>
-          </a:p>
-        </p:txBody>
-      </p:sp>
-      <p:sp>
-        <p:nvSpPr>
-          <p:cNvPr id="563" name="nav">
-            <a:hlinkClick action="ppaction://hlinksldjump" r:id="rId17"/>
-          </p:cNvPr>
-          <p:cNvSpPr/>
-          <p:nvPr/>
-        </p:nvSpPr>
-        <p:spPr>
-          <a:xfrm>
-            <a:off x="8065008" y="429768"/>
-            <a:ext cx="1289304" cy="338328"/>
-          </a:xfrm>
-          <a:prstGeom prst="snip1Rect">
-            <a:avLst/>
-          </a:prstGeom>
-          <a:noFill/>
-          <a:ln>
-            <a:noFill/>
-          </a:ln>
-          <a:effectLst/>
-        </p:spPr>
-        <p:style>
-          <a:lnRef idx="1">
-            <a:schemeClr val="accent1"/>
-          </a:lnRef>
-          <a:fillRef idx="3">
-            <a:schemeClr val="accent1"/>
-          </a:fillRef>
-          <a:effectRef idx="2">
-            <a:schemeClr val="accent1"/>
-          </a:effectRef>
-          <a:fontRef idx="minor">
-            <a:schemeClr val="lt1"/>
-          </a:fontRef>
-        </p:style>
-        <p:txBody>
-          <a:bodyPr rtlCol="0" anchor="ctr" lIns="73152" rIns="73152" tIns="0" bIns="0" wrap="square"/>
-          <a:lstStyle/>
-          <a:p>
-            <a:pPr algn="ctr"/>
-            <a:r>
-              <a:rPr sz="1100" b="0">
-                <a:solidFill>
-                  <a:srgbClr val="FFFFFF"/>
-                </a:solidFill>
-                <a:latin typeface="Manrope"/>
-              </a:rPr>
               <a:t>ОБСУЖДЕНИЕ</a:t>
             </a:r>
           </a:p>
@@ -33563,7 +34208,7 @@
       </p:sp>
       <p:sp>
         <p:nvSpPr>
-          <p:cNvPr id="564" name="nav">
+          <p:cNvPr id="570" name="nav">
             <a:hlinkClick action="ppaction://hlinksldjump" r:id="rId10"/>
           </p:cNvPr>
           <p:cNvSpPr/>
